--- a/Pregrado/Investigacion en ciencia y tecnologia/Clases/Sesion 06 - Socialización del artículo y cierre del curso/Presentacion.pptx
+++ b/Pregrado/Investigacion en ciencia y tecnologia/Clases/Sesion 06 - Socialización del artículo y cierre del curso/Presentacion.pptx
@@ -26,6 +26,8 @@
     <p:sldId id="274" r:id="rId25"/>
     <p:sldId id="275" r:id="rId26"/>
     <p:sldId id="276" r:id="rId27"/>
+    <p:sldId id="277" r:id="rId28"/>
+    <p:sldId id="278" r:id="rId29"/>
   </p:sldIdLst>
   <p:sldSz cx="12191695" cy="6858000" type="screen4x3"/>
   <p:notesSz cx="6858000" cy="9144000"/>
@@ -4042,7 +4044,7 @@
                 </a:solidFill>
                 <a:latin typeface="Calibri"/>
               </a:rPr>
-              <a:t>TALLER · Ronda de socialización (~25 min)</a:t>
+              <a:t>TALLER · Ronda de socialización</a:t>
             </a:r>
           </a:p>
         </p:txBody>
@@ -4055,8 +4057,8 @@
         </p:nvSpPr>
         <p:spPr>
           <a:xfrm>
-            <a:off x="640080" y="1691639"/>
-            <a:ext cx="10911535" cy="4617720"/>
+            <a:off x="640080" y="1280160"/>
+            <a:ext cx="10911535" cy="411480"/>
           </a:xfrm>
           <a:prstGeom prst="rect">
             <a:avLst/>
@@ -4069,13 +4071,48 @@
           </a:bodyPr>
           <a:lstStyle/>
           <a:p>
+            <a:pPr algn="ctr"/>
+            <a:r>
+              <a:rPr sz="1500" b="0" i="0">
+                <a:solidFill>
+                  <a:srgbClr val="2B2B2B"/>
+                </a:solidFill>
+                <a:latin typeface="Calibri"/>
+              </a:rPr>
+              <a:t>En ronda, por turnos · el Docente modera y toma el tiempo</a:t>
+            </a:r>
+          </a:p>
+        </p:txBody>
+      </p:sp>
+      <p:sp>
+        <p:nvSpPr>
+          <p:cNvPr id="5" name="TextBox 4"/>
+          <p:cNvSpPr txBox="1"/>
+          <p:nvPr/>
+        </p:nvSpPr>
+        <p:spPr>
+          <a:xfrm>
+            <a:off x="640080" y="2011679"/>
+            <a:ext cx="10911535" cy="4297680"/>
+          </a:xfrm>
+          <a:prstGeom prst="rect">
+            <a:avLst/>
+          </a:prstGeom>
+          <a:noFill/>
+        </p:spPr>
+        <p:txBody>
+          <a:bodyPr wrap="square" anchor="t" lIns="0" rIns="0" tIns="0" bIns="0">
+            <a:spAutoFit/>
+          </a:bodyPr>
+          <a:lstStyle/>
+          <a:p>
             <a:pPr>
               <a:spcAft>
                 <a:spcPts val="1000"/>
               </a:spcAft>
             </a:pPr>
             <a:r>
-              <a:rPr sz="1400" b="0" i="0">
+              <a:rPr sz="1600" b="0" i="0">
                 <a:solidFill>
                   <a:srgbClr val="2B2B2B"/>
                 </a:solidFill>
@@ -4084,56 +4121,22 @@
               <a:t>–   </a:t>
             </a:r>
             <a:r>
-              <a:rPr sz="1400" b="1" i="0">
-                <a:solidFill>
-                  <a:srgbClr val="2B2B2B"/>
-                </a:solidFill>
-                <a:latin typeface="Calibri"/>
-              </a:rPr>
-              <a:t>Paso 1 (16 min) · Rondas de 4 minutos.</a:t>
-            </a:r>
-            <a:r>
-              <a:rPr sz="1400" b="0" i="0">
-                <a:solidFill>
-                  <a:srgbClr val="2B2B2B"/>
-                </a:solidFill>
-                <a:latin typeface="Calibri"/>
-              </a:rPr>
-              <a:t> Cada quien cuenta su artículo con la estructura de hoy y recibe dos preguntas.</a:t>
-            </a:r>
-          </a:p>
-          <a:p>
-            <a:pPr lvl="1">
-              <a:spcAft>
-                <a:spcPts val="600"/>
-              </a:spcAft>
-            </a:pPr>
-            <a:r>
-              <a:rPr sz="1300" b="0" i="0">
-                <a:solidFill>
-                  <a:srgbClr val="2B2B2B"/>
-                </a:solidFill>
-                <a:latin typeface="Calibri"/>
-              </a:rPr>
-              <a:t>●   Quien escucha toma nota con los </a:t>
-            </a:r>
-            <a:r>
-              <a:rPr sz="1300" b="1" i="0">
-                <a:solidFill>
-                  <a:srgbClr val="2B2B2B"/>
-                </a:solidFill>
-                <a:latin typeface="Calibri"/>
-              </a:rPr>
-              <a:t>cuatro criterios de la rúbrica</a:t>
-            </a:r>
-            <a:r>
-              <a:rPr sz="1300" b="0" i="0">
-                <a:solidFill>
-                  <a:srgbClr val="2B2B2B"/>
-                </a:solidFill>
-                <a:latin typeface="Calibri"/>
-              </a:rPr>
-              <a:t>. Una línea por criterio, no más.</a:t>
+              <a:rPr sz="1600" b="1" i="0">
+                <a:solidFill>
+                  <a:srgbClr val="2B2B2B"/>
+                </a:solidFill>
+                <a:latin typeface="Calibri"/>
+              </a:rPr>
+              <a:t>Al final tiene:</a:t>
+            </a:r>
+            <a:r>
+              <a:rPr sz="1600" b="0" i="0">
+                <a:solidFill>
+                  <a:srgbClr val="2B2B2B"/>
+                </a:solidFill>
+                <a:latin typeface="Calibri"/>
+              </a:rPr>
+              <a:t> una lista escrita de tres ajustes y la devolución de un compañero anotada.</a:t>
             </a:r>
           </a:p>
           <a:p>
@@ -4143,7 +4146,7 @@
               </a:spcAft>
             </a:pPr>
             <a:r>
-              <a:rPr sz="1400" b="0" i="0">
+              <a:rPr sz="1600" b="0" i="0">
                 <a:solidFill>
                   <a:srgbClr val="2B2B2B"/>
                 </a:solidFill>
@@ -4152,40 +4155,58 @@
               <a:t>–   </a:t>
             </a:r>
             <a:r>
-              <a:rPr sz="1400" b="1" i="0">
-                <a:solidFill>
-                  <a:srgbClr val="2B2B2B"/>
-                </a:solidFill>
-                <a:latin typeface="Calibri"/>
-              </a:rPr>
-              <a:t>Paso 2 (5 min) · Devolución en pareja.</a:t>
-            </a:r>
-            <a:r>
-              <a:rPr sz="1400" b="0" i="0">
-                <a:solidFill>
-                  <a:srgbClr val="2B2B2B"/>
-                </a:solidFill>
-                <a:latin typeface="Calibri"/>
-              </a:rPr>
-              <a:t> Cada quien le entrega a su compañero las </a:t>
-            </a:r>
-            <a:r>
-              <a:rPr sz="1400" b="1" i="0">
-                <a:solidFill>
-                  <a:srgbClr val="2B2B2B"/>
-                </a:solidFill>
-                <a:latin typeface="Calibri"/>
-              </a:rPr>
-              <a:t>tres frases</a:t>
-            </a:r>
-            <a:r>
-              <a:rPr sz="1400" b="0" i="0">
-                <a:solidFill>
-                  <a:srgbClr val="2B2B2B"/>
-                </a:solidFill>
-                <a:latin typeface="Calibri"/>
-              </a:rPr>
-              <a:t>: me quedó claro / no me quedó claro / le sugiero.</a:t>
+              <a:rPr sz="1600" b="1" i="0">
+                <a:solidFill>
+                  <a:srgbClr val="2B2B2B"/>
+                </a:solidFill>
+                <a:latin typeface="Calibri"/>
+              </a:rPr>
+              <a:t>Paso 1</a:t>
+            </a:r>
+            <a:r>
+              <a:rPr sz="1600" b="0" i="0">
+                <a:solidFill>
+                  <a:srgbClr val="2B2B2B"/>
+                </a:solidFill>
+                <a:latin typeface="Calibri"/>
+              </a:rPr>
+              <a:t> · </a:t>
+            </a:r>
+            <a:r>
+              <a:rPr sz="1600" b="1" i="0">
+                <a:solidFill>
+                  <a:srgbClr val="2B2B2B"/>
+                </a:solidFill>
+                <a:latin typeface="Calibri"/>
+              </a:rPr>
+              <a:t>Ronda:</a:t>
+            </a:r>
+            <a:r>
+              <a:rPr sz="1600" b="0" i="0">
+                <a:solidFill>
+                  <a:srgbClr val="2B2B2B"/>
+                </a:solidFill>
+                <a:latin typeface="Calibri"/>
+              </a:rPr>
+              <a:t> cuente su artículo con la estructura de hoy y reciba dos preguntas. Quien escucha toma nota con los </a:t>
+            </a:r>
+            <a:r>
+              <a:rPr sz="1600" b="1" i="0">
+                <a:solidFill>
+                  <a:srgbClr val="2B2B2B"/>
+                </a:solidFill>
+                <a:latin typeface="Calibri"/>
+              </a:rPr>
+              <a:t>cuatro criterios de la rúbrica</a:t>
+            </a:r>
+            <a:r>
+              <a:rPr sz="1600" b="0" i="0">
+                <a:solidFill>
+                  <a:srgbClr val="2B2B2B"/>
+                </a:solidFill>
+                <a:latin typeface="Calibri"/>
+              </a:rPr>
+              <a:t>, una línea por criterio.</a:t>
             </a:r>
           </a:p>
           <a:p>
@@ -4195,7 +4216,7 @@
               </a:spcAft>
             </a:pPr>
             <a:r>
-              <a:rPr sz="1400" b="0" i="0">
+              <a:rPr sz="1600" b="0" i="0">
                 <a:solidFill>
                   <a:srgbClr val="2B2B2B"/>
                 </a:solidFill>
@@ -4204,74 +4225,58 @@
               <a:t>–   </a:t>
             </a:r>
             <a:r>
-              <a:rPr sz="1400" b="1" i="0">
-                <a:solidFill>
-                  <a:srgbClr val="2B2B2B"/>
-                </a:solidFill>
-                <a:latin typeface="Calibri"/>
-              </a:rPr>
-              <a:t>Paso 3 (3 min) · Lista de ajustes.</a:t>
-            </a:r>
-            <a:r>
-              <a:rPr sz="1400" b="0" i="0">
-                <a:solidFill>
-                  <a:srgbClr val="2B2B2B"/>
-                </a:solidFill>
-                <a:latin typeface="Calibri"/>
-              </a:rPr>
-              <a:t> Con la devolución en la mano, escriba los </a:t>
-            </a:r>
-            <a:r>
-              <a:rPr sz="1400" b="1" i="0">
-                <a:solidFill>
-                  <a:srgbClr val="2B2B2B"/>
-                </a:solidFill>
-                <a:latin typeface="Calibri"/>
-              </a:rPr>
-              <a:t>tres arreglos</a:t>
-            </a:r>
-            <a:r>
-              <a:rPr sz="1400" b="0" i="0">
-                <a:solidFill>
-                  <a:srgbClr val="2B2B2B"/>
-                </a:solidFill>
-                <a:latin typeface="Calibri"/>
-              </a:rPr>
-              <a:t> que le va a hacer al documento.</a:t>
-            </a:r>
-          </a:p>
-          <a:p>
-            <a:pPr lvl="1">
-              <a:spcAft>
-                <a:spcPts val="600"/>
-              </a:spcAft>
-            </a:pPr>
-            <a:r>
-              <a:rPr sz="1300" b="0" i="0">
-                <a:solidFill>
-                  <a:srgbClr val="2B2B2B"/>
-                </a:solidFill>
-                <a:latin typeface="Calibri"/>
-              </a:rPr>
-              <a:t>●   No los haga ahora: </a:t>
-            </a:r>
-            <a:r>
-              <a:rPr sz="1300" b="1" i="0">
-                <a:solidFill>
-                  <a:srgbClr val="2B2B2B"/>
-                </a:solidFill>
-                <a:latin typeface="Calibri"/>
-              </a:rPr>
-              <a:t>anótelos</a:t>
-            </a:r>
-            <a:r>
-              <a:rPr sz="1300" b="0" i="0">
-                <a:solidFill>
-                  <a:srgbClr val="2B2B2B"/>
-                </a:solidFill>
-                <a:latin typeface="Calibri"/>
-              </a:rPr>
-              <a:t>. Escribir la lista es el producto del taller.</a:t>
+              <a:rPr sz="1600" b="1" i="0">
+                <a:solidFill>
+                  <a:srgbClr val="2B2B2B"/>
+                </a:solidFill>
+                <a:latin typeface="Calibri"/>
+              </a:rPr>
+              <a:t>Paso 2</a:t>
+            </a:r>
+            <a:r>
+              <a:rPr sz="1600" b="0" i="0">
+                <a:solidFill>
+                  <a:srgbClr val="2B2B2B"/>
+                </a:solidFill>
+                <a:latin typeface="Calibri"/>
+              </a:rPr>
+              <a:t> · </a:t>
+            </a:r>
+            <a:r>
+              <a:rPr sz="1600" b="1" i="0">
+                <a:solidFill>
+                  <a:srgbClr val="2B2B2B"/>
+                </a:solidFill>
+                <a:latin typeface="Calibri"/>
+              </a:rPr>
+              <a:t>Devolución en pareja:</a:t>
+            </a:r>
+            <a:r>
+              <a:rPr sz="1600" b="0" i="0">
+                <a:solidFill>
+                  <a:srgbClr val="2B2B2B"/>
+                </a:solidFill>
+                <a:latin typeface="Calibri"/>
+              </a:rPr>
+              <a:t> entréguele a su compañero las </a:t>
+            </a:r>
+            <a:r>
+              <a:rPr sz="1600" b="1" i="0">
+                <a:solidFill>
+                  <a:srgbClr val="2B2B2B"/>
+                </a:solidFill>
+                <a:latin typeface="Calibri"/>
+              </a:rPr>
+              <a:t>tres frases</a:t>
+            </a:r>
+            <a:r>
+              <a:rPr sz="1600" b="0" i="0">
+                <a:solidFill>
+                  <a:srgbClr val="2B2B2B"/>
+                </a:solidFill>
+                <a:latin typeface="Calibri"/>
+              </a:rPr>
+              <a:t> —me quedó claro / no me quedó claro / le sugiero—.</a:t>
             </a:r>
           </a:p>
           <a:p>
@@ -4281,7 +4286,7 @@
               </a:spcAft>
             </a:pPr>
             <a:r>
-              <a:rPr sz="1400" b="0" i="0">
+              <a:rPr sz="1600" b="0" i="0">
                 <a:solidFill>
                   <a:srgbClr val="2B2B2B"/>
                 </a:solidFill>
@@ -4290,58 +4295,76 @@
               <a:t>–   </a:t>
             </a:r>
             <a:r>
-              <a:rPr sz="1400" b="1" i="0">
-                <a:solidFill>
-                  <a:srgbClr val="2B2B2B"/>
-                </a:solidFill>
-                <a:latin typeface="Calibri"/>
-              </a:rPr>
-              <a:t>Paso 4 (1 min) · Abra CDigital</a:t>
-            </a:r>
-            <a:r>
-              <a:rPr sz="1400" b="0" i="0">
-                <a:solidFill>
-                  <a:srgbClr val="2B2B2B"/>
-                </a:solidFill>
-                <a:latin typeface="Calibri"/>
-              </a:rPr>
-              <a:t> y verifique que ve los espacios de </a:t>
-            </a:r>
-            <a:r>
-              <a:rPr sz="1400" b="1" i="0">
-                <a:solidFill>
-                  <a:srgbClr val="2B2B2B"/>
-                </a:solidFill>
-                <a:latin typeface="Calibri"/>
-              </a:rPr>
-              <a:t>autoevaluación</a:t>
-            </a:r>
-            <a:r>
-              <a:rPr sz="1400" b="0" i="0">
-                <a:solidFill>
-                  <a:srgbClr val="2B2B2B"/>
-                </a:solidFill>
-                <a:latin typeface="Calibri"/>
-              </a:rPr>
-              <a:t> y </a:t>
-            </a:r>
-            <a:r>
-              <a:rPr sz="1400" b="1" i="0">
-                <a:solidFill>
-                  <a:srgbClr val="2B2B2B"/>
-                </a:solidFill>
-                <a:latin typeface="Calibri"/>
-              </a:rPr>
-              <a:t>coevaluación</a:t>
-            </a:r>
-            <a:r>
-              <a:rPr sz="1400" b="0" i="0">
-                <a:solidFill>
-                  <a:srgbClr val="2B2B2B"/>
-                </a:solidFill>
-                <a:latin typeface="Calibri"/>
-              </a:rPr>
-              <a:t>, y sus fechas.</a:t>
+              <a:rPr sz="1600" b="1" i="0">
+                <a:solidFill>
+                  <a:srgbClr val="2B2B2B"/>
+                </a:solidFill>
+                <a:latin typeface="Calibri"/>
+              </a:rPr>
+              <a:t>Paso 3</a:t>
+            </a:r>
+            <a:r>
+              <a:rPr sz="1600" b="0" i="0">
+                <a:solidFill>
+                  <a:srgbClr val="2B2B2B"/>
+                </a:solidFill>
+                <a:latin typeface="Calibri"/>
+              </a:rPr>
+              <a:t> · </a:t>
+            </a:r>
+            <a:r>
+              <a:rPr sz="1600" b="1" i="0">
+                <a:solidFill>
+                  <a:srgbClr val="2B2B2B"/>
+                </a:solidFill>
+                <a:latin typeface="Calibri"/>
+              </a:rPr>
+              <a:t>Lista de ajustes:</a:t>
+            </a:r>
+            <a:r>
+              <a:rPr sz="1600" b="0" i="0">
+                <a:solidFill>
+                  <a:srgbClr val="2B2B2B"/>
+                </a:solidFill>
+                <a:latin typeface="Calibri"/>
+              </a:rPr>
+              <a:t> con la devolución en la mano, escriba los </a:t>
+            </a:r>
+            <a:r>
+              <a:rPr sz="1600" b="1" i="0">
+                <a:solidFill>
+                  <a:srgbClr val="2B2B2B"/>
+                </a:solidFill>
+                <a:latin typeface="Calibri"/>
+              </a:rPr>
+              <a:t>tres arreglos</a:t>
+            </a:r>
+            <a:r>
+              <a:rPr sz="1600" b="0" i="0">
+                <a:solidFill>
+                  <a:srgbClr val="2B2B2B"/>
+                </a:solidFill>
+                <a:latin typeface="Calibri"/>
+              </a:rPr>
+              <a:t> que le va a hacer al documento. No los haga ahora: </a:t>
+            </a:r>
+            <a:r>
+              <a:rPr sz="1600" b="1" i="0">
+                <a:solidFill>
+                  <a:srgbClr val="2B2B2B"/>
+                </a:solidFill>
+                <a:latin typeface="Calibri"/>
+              </a:rPr>
+              <a:t>anótelos</a:t>
+            </a:r>
+            <a:r>
+              <a:rPr sz="1600" b="0" i="0">
+                <a:solidFill>
+                  <a:srgbClr val="2B2B2B"/>
+                </a:solidFill>
+                <a:latin typeface="Calibri"/>
+              </a:rPr>
+              <a:t>.</a:t>
             </a:r>
           </a:p>
           <a:p>
@@ -4351,7 +4374,7 @@
               </a:spcAft>
             </a:pPr>
             <a:r>
-              <a:rPr sz="1400" b="0" i="0">
+              <a:rPr sz="1600" b="0" i="0">
                 <a:solidFill>
                   <a:srgbClr val="2B2B2B"/>
                 </a:solidFill>
@@ -4360,92 +4383,76 @@
               <a:t>–   </a:t>
             </a:r>
             <a:r>
-              <a:rPr sz="1400" b="1" i="0">
-                <a:solidFill>
-                  <a:srgbClr val="2B2B2B"/>
-                </a:solidFill>
-                <a:latin typeface="Calibri"/>
-              </a:rPr>
-              <a:t>Criterio de éxito (verificable):</a:t>
-            </a:r>
-            <a:r>
-              <a:rPr sz="1400" b="0" i="0">
-                <a:solidFill>
-                  <a:srgbClr val="2B2B2B"/>
-                </a:solidFill>
-                <a:latin typeface="Calibri"/>
-              </a:rPr>
-              <a:t> sale con </a:t>
-            </a:r>
-            <a:r>
-              <a:rPr sz="1400" b="1" i="0">
-                <a:solidFill>
-                  <a:srgbClr val="2B2B2B"/>
-                </a:solidFill>
-                <a:latin typeface="Calibri"/>
-              </a:rPr>
-              <a:t>una lista escrita de tres ajustes</a:t>
-            </a:r>
-            <a:r>
-              <a:rPr sz="1400" b="0" i="0">
-                <a:solidFill>
-                  <a:srgbClr val="2B2B2B"/>
-                </a:solidFill>
-                <a:latin typeface="Calibri"/>
-              </a:rPr>
-              <a:t> y con </a:t>
-            </a:r>
-            <a:r>
-              <a:rPr sz="1400" b="1" i="0">
-                <a:solidFill>
-                  <a:srgbClr val="2B2B2B"/>
-                </a:solidFill>
-                <a:latin typeface="Calibri"/>
-              </a:rPr>
-              <a:t>la devolución de un compañero</a:t>
-            </a:r>
-            <a:r>
-              <a:rPr sz="1400" b="0" i="0">
-                <a:solidFill>
-                  <a:srgbClr val="2B2B2B"/>
-                </a:solidFill>
-                <a:latin typeface="Calibri"/>
-              </a:rPr>
-              <a:t> anotada, no recordada.</a:t>
-            </a:r>
-          </a:p>
-          <a:p>
-            <a:pPr lvl="1">
-              <a:spcAft>
-                <a:spcPts val="600"/>
-              </a:spcAft>
-            </a:pPr>
-            <a:r>
-              <a:rPr sz="1300" b="0" i="0">
-                <a:solidFill>
-                  <a:srgbClr val="2B2B2B"/>
-                </a:solidFill>
-                <a:latin typeface="Calibri"/>
-              </a:rPr>
-              <a:t>●   Segunda verificación: su compañero pudo repetir </a:t>
-            </a:r>
-            <a:r>
-              <a:rPr sz="1300" b="1" i="0">
-                <a:solidFill>
-                  <a:srgbClr val="2B2B2B"/>
-                </a:solidFill>
-                <a:latin typeface="Calibri"/>
-              </a:rPr>
-              <a:t>su pregunta y a quién afecta</a:t>
-            </a:r>
-            <a:r>
-              <a:rPr sz="1300" b="0" i="0">
-                <a:solidFill>
-                  <a:srgbClr val="2B2B2B"/>
-                </a:solidFill>
-                <a:latin typeface="Calibri"/>
-              </a:rPr>
-              <a:t> sin mirar el documento.</a:t>
+              <a:rPr sz="1600" b="1" i="0">
+                <a:solidFill>
+                  <a:srgbClr val="2B2B2B"/>
+                </a:solidFill>
+                <a:latin typeface="Calibri"/>
+              </a:rPr>
+              <a:t>Paso 4</a:t>
+            </a:r>
+            <a:r>
+              <a:rPr sz="1600" b="0" i="0">
+                <a:solidFill>
+                  <a:srgbClr val="2B2B2B"/>
+                </a:solidFill>
+                <a:latin typeface="Calibri"/>
+              </a:rPr>
+              <a:t> · </a:t>
+            </a:r>
+            <a:r>
+              <a:rPr sz="1600" b="1" i="0">
+                <a:solidFill>
+                  <a:srgbClr val="2B2B2B"/>
+                </a:solidFill>
+                <a:latin typeface="Calibri"/>
+              </a:rPr>
+              <a:t>Abra CDigital</a:t>
+            </a:r>
+            <a:r>
+              <a:rPr sz="1600" b="0" i="0">
+                <a:solidFill>
+                  <a:srgbClr val="2B2B2B"/>
+                </a:solidFill>
+                <a:latin typeface="Calibri"/>
+              </a:rPr>
+              <a:t> y verifique que ve los espacios de </a:t>
+            </a:r>
+            <a:r>
+              <a:rPr sz="1600" b="1" i="0">
+                <a:solidFill>
+                  <a:srgbClr val="2B2B2B"/>
+                </a:solidFill>
+                <a:latin typeface="Calibri"/>
+              </a:rPr>
+              <a:t>autoevaluación</a:t>
+            </a:r>
+            <a:r>
+              <a:rPr sz="1600" b="0" i="0">
+                <a:solidFill>
+                  <a:srgbClr val="2B2B2B"/>
+                </a:solidFill>
+                <a:latin typeface="Calibri"/>
+              </a:rPr>
+              <a:t> y </a:t>
+            </a:r>
+            <a:r>
+              <a:rPr sz="1600" b="1" i="0">
+                <a:solidFill>
+                  <a:srgbClr val="2B2B2B"/>
+                </a:solidFill>
+                <a:latin typeface="Calibri"/>
+              </a:rPr>
+              <a:t>coevaluación</a:t>
+            </a:r>
+            <a:r>
+              <a:rPr sz="1600" b="0" i="0">
+                <a:solidFill>
+                  <a:srgbClr val="2B2B2B"/>
+                </a:solidFill>
+                <a:latin typeface="Calibri"/>
+              </a:rPr>
+              <a:t>, y sus fechas.</a:t>
             </a:r>
           </a:p>
           <a:p>
@@ -4455,38 +4462,56 @@
               </a:spcAft>
             </a:pPr>
             <a:r>
-              <a:rPr sz="1400" b="0" i="0">
-                <a:solidFill>
-                  <a:srgbClr val="2B2B2B"/>
-                </a:solidFill>
-                <a:latin typeface="Calibri"/>
-              </a:rPr>
-              <a:t>–   Quien no alcance a socializar en clase lo hace por el </a:t>
-            </a:r>
-            <a:r>
-              <a:rPr sz="1400" b="1" i="0">
-                <a:solidFill>
-                  <a:srgbClr val="2B2B2B"/>
-                </a:solidFill>
-                <a:latin typeface="Calibri"/>
-              </a:rPr>
-              <a:t>foro del curso</a:t>
-            </a:r>
-            <a:r>
-              <a:rPr sz="1400" b="0" i="0">
-                <a:solidFill>
-                  <a:srgbClr val="2B2B2B"/>
-                </a:solidFill>
-                <a:latin typeface="Calibri"/>
-              </a:rPr>
-              <a:t>: pregunta, dos constructos y la frase de qué está listo y qué falta.</a:t>
-            </a:r>
-          </a:p>
-        </p:txBody>
-      </p:sp>
-      <p:sp>
-        <p:nvSpPr>
-          <p:cNvPr id="5" name="TextBox 4"/>
+              <a:rPr sz="1600" b="0" i="0">
+                <a:solidFill>
+                  <a:srgbClr val="2B2B2B"/>
+                </a:solidFill>
+                <a:latin typeface="Calibri"/>
+              </a:rPr>
+              <a:t>–   </a:t>
+            </a:r>
+            <a:r>
+              <a:rPr sz="1600" b="1" i="0">
+                <a:solidFill>
+                  <a:srgbClr val="2B2B2B"/>
+                </a:solidFill>
+                <a:latin typeface="Calibri"/>
+              </a:rPr>
+              <a:t>En clase, sin falta:</a:t>
+            </a:r>
+            <a:r>
+              <a:rPr sz="1600" b="0" i="0">
+                <a:solidFill>
+                  <a:srgbClr val="2B2B2B"/>
+                </a:solidFill>
+                <a:latin typeface="Calibri"/>
+              </a:rPr>
+              <a:t> los </a:t>
+            </a:r>
+            <a:r>
+              <a:rPr sz="1600" b="1" i="0">
+                <a:solidFill>
+                  <a:srgbClr val="2B2B2B"/>
+                </a:solidFill>
+                <a:latin typeface="Calibri"/>
+              </a:rPr>
+              <a:t>pasos 1 a 2</a:t>
+            </a:r>
+            <a:r>
+              <a:rPr sz="1600" b="0" i="0">
+                <a:solidFill>
+                  <a:srgbClr val="2B2B2B"/>
+                </a:solidFill>
+                <a:latin typeface="Calibri"/>
+              </a:rPr>
+              <a:t>. Del 3 en adelante puede quedar en trabajo autónomo, pero antes de la próxima sesión.</a:t>
+            </a:r>
+          </a:p>
+        </p:txBody>
+      </p:sp>
+      <p:sp>
+        <p:nvSpPr>
+          <p:cNvPr id="6" name="TextBox 5"/>
           <p:cNvSpPr txBox="1"/>
           <p:nvPr/>
         </p:nvSpPr>
@@ -4521,7 +4546,7 @@
       </p:sp>
       <p:sp>
         <p:nvSpPr>
-          <p:cNvPr id="6" name="TextBox 5"/>
+          <p:cNvPr id="7" name="TextBox 6"/>
           <p:cNvSpPr txBox="1"/>
           <p:nvPr/>
         </p:nvSpPr>
@@ -4653,7 +4678,7 @@
                 </a:solidFill>
                 <a:latin typeface="Calibri"/>
               </a:rPr>
-              <a:t>Autoevaluación y coevaluación: qué son y cómo se diligencian</a:t>
+              <a:t>TALLER · cómo se revisa y dónde se entrega</a:t>
             </a:r>
           </a:p>
         </p:txBody>
@@ -4666,8 +4691,8 @@
         </p:nvSpPr>
         <p:spPr>
           <a:xfrm>
-            <a:off x="640080" y="1691639"/>
-            <a:ext cx="10911535" cy="4617720"/>
+            <a:off x="640080" y="1280160"/>
+            <a:ext cx="10911535" cy="411480"/>
           </a:xfrm>
           <a:prstGeom prst="rect">
             <a:avLst/>
@@ -4680,6 +4705,41 @@
           </a:bodyPr>
           <a:lstStyle/>
           <a:p>
+            <a:pPr algn="ctr"/>
+            <a:r>
+              <a:rPr sz="1500" b="0" i="0">
+                <a:solidFill>
+                  <a:srgbClr val="2B2B2B"/>
+                </a:solidFill>
+                <a:latin typeface="Calibri"/>
+              </a:rPr>
+              <a:t>Ronda de socialización</a:t>
+            </a:r>
+          </a:p>
+        </p:txBody>
+      </p:sp>
+      <p:sp>
+        <p:nvSpPr>
+          <p:cNvPr id="5" name="TextBox 4"/>
+          <p:cNvSpPr txBox="1"/>
+          <p:nvPr/>
+        </p:nvSpPr>
+        <p:spPr>
+          <a:xfrm>
+            <a:off x="640080" y="2011679"/>
+            <a:ext cx="10911535" cy="4297680"/>
+          </a:xfrm>
+          <a:prstGeom prst="rect">
+            <a:avLst/>
+          </a:prstGeom>
+          <a:noFill/>
+        </p:spPr>
+        <p:txBody>
+          <a:bodyPr wrap="square" anchor="t" lIns="0" rIns="0" tIns="0" bIns="0">
+            <a:spAutoFit/>
+          </a:bodyPr>
+          <a:lstStyle/>
+          <a:p>
             <a:pPr>
               <a:spcAft>
                 <a:spcPts val="1000"/>
@@ -4692,7 +4752,7 @@
                 </a:solidFill>
                 <a:latin typeface="Calibri"/>
               </a:rPr>
-              <a:t>–   Son </a:t>
+              <a:t>–   </a:t>
             </a:r>
             <a:r>
               <a:rPr sz="1600" b="1" i="0">
@@ -4701,7 +4761,7 @@
                 </a:solidFill>
                 <a:latin typeface="Calibri"/>
               </a:rPr>
-              <a:t>dos ítems del corte 3</a:t>
+              <a:t>Quedó bien si</a:t>
             </a:r>
             <a:r>
               <a:rPr sz="1600" b="0" i="0">
@@ -4710,25 +4770,109 @@
                 </a:solidFill>
                 <a:latin typeface="Calibri"/>
               </a:rPr>
-              <a:t> con nota propia, y se </a:t>
-            </a:r>
-            <a:r>
-              <a:rPr sz="1600" b="1" i="0">
-                <a:solidFill>
-                  <a:srgbClr val="2B2B2B"/>
-                </a:solidFill>
-                <a:latin typeface="Calibri"/>
-              </a:rPr>
-              <a:t>abren hoy</a:t>
-            </a:r>
-            <a:r>
-              <a:rPr sz="1600" b="0" i="0">
-                <a:solidFill>
-                  <a:srgbClr val="2B2B2B"/>
-                </a:solidFill>
-                <a:latin typeface="Calibri"/>
-              </a:rPr>
-              <a:t> en CDigital. No son un trámite ni un formalismo.</a:t>
+              <a:t> —compruébelo usted antes de cerrar el documento—:</a:t>
+            </a:r>
+          </a:p>
+          <a:p>
+            <a:pPr lvl="1">
+              <a:spcAft>
+                <a:spcPts val="600"/>
+              </a:spcAft>
+            </a:pPr>
+            <a:r>
+              <a:rPr sz="1500" b="0" i="0">
+                <a:solidFill>
+                  <a:srgbClr val="2B2B2B"/>
+                </a:solidFill>
+                <a:latin typeface="Calibri"/>
+              </a:rPr>
+              <a:t>●   Sale con </a:t>
+            </a:r>
+            <a:r>
+              <a:rPr sz="1500" b="1" i="0">
+                <a:solidFill>
+                  <a:srgbClr val="2B2B2B"/>
+                </a:solidFill>
+                <a:latin typeface="Calibri"/>
+              </a:rPr>
+              <a:t>tres ajustes escritos</a:t>
+            </a:r>
+            <a:r>
+              <a:rPr sz="1500" b="0" i="0">
+                <a:solidFill>
+                  <a:srgbClr val="2B2B2B"/>
+                </a:solidFill>
+                <a:latin typeface="Calibri"/>
+              </a:rPr>
+              <a:t>, no recordados.</a:t>
+            </a:r>
+          </a:p>
+          <a:p>
+            <a:pPr lvl="1">
+              <a:spcAft>
+                <a:spcPts val="600"/>
+              </a:spcAft>
+            </a:pPr>
+            <a:r>
+              <a:rPr sz="1500" b="0" i="0">
+                <a:solidFill>
+                  <a:srgbClr val="2B2B2B"/>
+                </a:solidFill>
+                <a:latin typeface="Calibri"/>
+              </a:rPr>
+              <a:t>●   Tiene </a:t>
+            </a:r>
+            <a:r>
+              <a:rPr sz="1500" b="1" i="0">
+                <a:solidFill>
+                  <a:srgbClr val="2B2B2B"/>
+                </a:solidFill>
+                <a:latin typeface="Calibri"/>
+              </a:rPr>
+              <a:t>anotada</a:t>
+            </a:r>
+            <a:r>
+              <a:rPr sz="1500" b="0" i="0">
+                <a:solidFill>
+                  <a:srgbClr val="2B2B2B"/>
+                </a:solidFill>
+                <a:latin typeface="Calibri"/>
+              </a:rPr>
+              <a:t> la devolución de un compañero.</a:t>
+            </a:r>
+          </a:p>
+          <a:p>
+            <a:pPr lvl="1">
+              <a:spcAft>
+                <a:spcPts val="600"/>
+              </a:spcAft>
+            </a:pPr>
+            <a:r>
+              <a:rPr sz="1500" b="0" i="0">
+                <a:solidFill>
+                  <a:srgbClr val="2B2B2B"/>
+                </a:solidFill>
+                <a:latin typeface="Calibri"/>
+              </a:rPr>
+              <a:t>●   Su compañero pudo repetir </a:t>
+            </a:r>
+            <a:r>
+              <a:rPr sz="1500" b="1" i="0">
+                <a:solidFill>
+                  <a:srgbClr val="2B2B2B"/>
+                </a:solidFill>
+                <a:latin typeface="Calibri"/>
+              </a:rPr>
+              <a:t>su pregunta y a quién afecta</a:t>
+            </a:r>
+            <a:r>
+              <a:rPr sz="1500" b="0" i="0">
+                <a:solidFill>
+                  <a:srgbClr val="2B2B2B"/>
+                </a:solidFill>
+                <a:latin typeface="Calibri"/>
+              </a:rPr>
+              <a:t> sin mirar el documento.</a:t>
             </a:r>
           </a:p>
           <a:p>
@@ -4753,7 +4897,7 @@
                 </a:solidFill>
                 <a:latin typeface="Calibri"/>
               </a:rPr>
-              <a:t>Autoevaluación</a:t>
+              <a:t>Plan B:</a:t>
             </a:r>
             <a:r>
               <a:rPr sz="1600" b="0" i="0">
@@ -4762,7 +4906,7 @@
                 </a:solidFill>
                 <a:latin typeface="Calibri"/>
               </a:rPr>
-              <a:t> — un </a:t>
+              <a:t> Si no alcanza a socializar en clase, hágalo por el </a:t>
             </a:r>
             <a:r>
               <a:rPr sz="1600" b="1" i="0">
@@ -4771,7 +4915,7 @@
                 </a:solidFill>
                 <a:latin typeface="Calibri"/>
               </a:rPr>
-              <a:t>cuestionario</a:t>
+              <a:t>foro del curso</a:t>
             </a:r>
             <a:r>
               <a:rPr sz="1600" b="0" i="0">
@@ -4780,41 +4924,7 @@
                 </a:solidFill>
                 <a:latin typeface="Calibri"/>
               </a:rPr>
-              <a:t> que usted responde sobre su propio proceso.</a:t>
-            </a:r>
-          </a:p>
-          <a:p>
-            <a:pPr lvl="1">
-              <a:spcAft>
-                <a:spcPts val="600"/>
-              </a:spcAft>
-            </a:pPr>
-            <a:r>
-              <a:rPr sz="1500" b="0" i="0">
-                <a:solidFill>
-                  <a:srgbClr val="2B2B2B"/>
-                </a:solidFill>
-                <a:latin typeface="Calibri"/>
-              </a:rPr>
-              <a:t>●   No se trata de ponerse 5,0 ni de castigarse: se trata de </a:t>
-            </a:r>
-            <a:r>
-              <a:rPr sz="1500" b="1" i="0">
-                <a:solidFill>
-                  <a:srgbClr val="2B2B2B"/>
-                </a:solidFill>
-                <a:latin typeface="Calibri"/>
-              </a:rPr>
-              <a:t>argumentar</a:t>
-            </a:r>
-            <a:r>
-              <a:rPr sz="1500" b="0" i="0">
-                <a:solidFill>
-                  <a:srgbClr val="2B2B2B"/>
-                </a:solidFill>
-                <a:latin typeface="Calibri"/>
-              </a:rPr>
-              <a:t> con hechos del periodo.</a:t>
+              <a:t>: la pregunta, los dos constructos y la frase de qué está listo y qué falta.</a:t>
             </a:r>
           </a:p>
           <a:p>
@@ -4839,7 +4949,7 @@
                 </a:solidFill>
                 <a:latin typeface="Calibri"/>
               </a:rPr>
-              <a:t>Coevaluación</a:t>
+              <a:t>Las entregas documentales del aula ya cerraron:</a:t>
             </a:r>
             <a:r>
               <a:rPr sz="1600" b="0" i="0">
@@ -4848,7 +4958,7 @@
                 </a:solidFill>
                 <a:latin typeface="Calibri"/>
               </a:rPr>
-              <a:t> — un </a:t>
+              <a:t> la </a:t>
             </a:r>
             <a:r>
               <a:rPr sz="1600" b="1" i="0">
@@ -4857,7 +4967,7 @@
                 </a:solidFill>
                 <a:latin typeface="Calibri"/>
               </a:rPr>
-              <a:t>foro</a:t>
+              <a:t>ACA Final</a:t>
             </a:r>
             <a:r>
               <a:rPr sz="1600" b="0" i="0">
@@ -4866,7 +4976,7 @@
                 </a:solidFill>
                 <a:latin typeface="Calibri"/>
               </a:rPr>
-              <a:t>: se </a:t>
+              <a:t> cerró en la semana de la </a:t>
             </a:r>
             <a:r>
               <a:rPr sz="1600" b="1" i="0">
@@ -4875,7 +4985,7 @@
                 </a:solidFill>
                 <a:latin typeface="Calibri"/>
               </a:rPr>
-              <a:t>participa</a:t>
+              <a:t>Sesión 05</a:t>
             </a:r>
             <a:r>
               <a:rPr sz="1600" b="0" i="0">
@@ -4884,57 +4994,7 @@
                 </a:solidFill>
                 <a:latin typeface="Calibri"/>
               </a:rPr>
-              <a:t>, no se sube archivo.</a:t>
-            </a:r>
-          </a:p>
-          <a:p>
-            <a:pPr lvl="1">
-              <a:spcAft>
-                <a:spcPts val="600"/>
-              </a:spcAft>
-            </a:pPr>
-            <a:r>
-              <a:rPr sz="1500" b="0" i="0">
-                <a:solidFill>
-                  <a:srgbClr val="2B2B2B"/>
-                </a:solidFill>
-                <a:latin typeface="Calibri"/>
-              </a:rPr>
-              <a:t>●   Escriba sobre el trabajo de sus compañeros con los </a:t>
-            </a:r>
-            <a:r>
-              <a:rPr sz="1500" b="1" i="0">
-                <a:solidFill>
-                  <a:srgbClr val="2B2B2B"/>
-                </a:solidFill>
-                <a:latin typeface="Calibri"/>
-              </a:rPr>
-              <a:t>cuatro criterios de la rúbrica</a:t>
-            </a:r>
-            <a:r>
-              <a:rPr sz="1500" b="0" i="0">
-                <a:solidFill>
-                  <a:srgbClr val="2B2B2B"/>
-                </a:solidFill>
-                <a:latin typeface="Calibri"/>
-              </a:rPr>
-              <a:t> de hoy. Un comentario útil menciona algo concreto que el otro dijo.</a:t>
-            </a:r>
-          </a:p>
-          <a:p>
-            <a:pPr lvl="1">
-              <a:spcAft>
-                <a:spcPts val="600"/>
-              </a:spcAft>
-            </a:pPr>
-            <a:r>
-              <a:rPr sz="1500" b="0" i="0">
-                <a:solidFill>
-                  <a:srgbClr val="2B2B2B"/>
-                </a:solidFill>
-                <a:latin typeface="Calibri"/>
-              </a:rPr>
-              <a:t>●   "Buen trabajo" no es coevaluar. Y responder al comentario de otro cuenta: un foro es una conversación.</a:t>
+              <a:t>. Guarde `S06_AjustesCierre_Apellido` (Google Doc o PDF) en su Drive.</a:t>
             </a:r>
           </a:p>
           <a:p>
@@ -4959,82 +5019,95 @@
                 </a:solidFill>
                 <a:latin typeface="Calibri"/>
               </a:rPr>
-              <a:t>Dos advertencias operativas:</a:t>
-            </a:r>
-          </a:p>
-          <a:p>
-            <a:pPr lvl="1">
-              <a:spcAft>
-                <a:spcPts val="600"/>
-              </a:spcAft>
-            </a:pPr>
-            <a:r>
-              <a:rPr sz="1500" b="0" i="0">
-                <a:solidFill>
-                  <a:srgbClr val="2B2B2B"/>
-                </a:solidFill>
-                <a:latin typeface="Calibri"/>
-              </a:rPr>
-              <a:t>●   El foro exige </a:t>
-            </a:r>
-            <a:r>
-              <a:rPr sz="1500" b="1" i="0">
-                <a:solidFill>
-                  <a:srgbClr val="2B2B2B"/>
-                </a:solidFill>
-                <a:latin typeface="Calibri"/>
-              </a:rPr>
-              <a:t>participar dentro de la ventana</a:t>
-            </a:r>
-            <a:r>
-              <a:rPr sz="1500" b="0" i="0">
-                <a:solidFill>
-                  <a:srgbClr val="2B2B2B"/>
-                </a:solidFill>
-                <a:latin typeface="Calibri"/>
-              </a:rPr>
-              <a:t>: si se cierra, no hay archivo que lo reemplace.</a:t>
-            </a:r>
-          </a:p>
-          <a:p>
-            <a:pPr lvl="1">
-              <a:spcAft>
-                <a:spcPts val="600"/>
-              </a:spcAft>
-            </a:pPr>
-            <a:r>
-              <a:rPr sz="1500" b="0" i="0">
-                <a:solidFill>
-                  <a:srgbClr val="2B2B2B"/>
-                </a:solidFill>
-                <a:latin typeface="Calibri"/>
-              </a:rPr>
-              <a:t>●   </a:t>
-            </a:r>
-            <a:r>
-              <a:rPr sz="1500" b="1" i="0">
-                <a:solidFill>
-                  <a:srgbClr val="2B2B2B"/>
-                </a:solidFill>
-                <a:latin typeface="Calibri"/>
-              </a:rPr>
-              <a:t>Las fechas exactas de apertura y cierre están en CDigital</a:t>
-            </a:r>
-            <a:r>
-              <a:rPr sz="1500" b="0" i="0">
-                <a:solidFill>
-                  <a:srgbClr val="2B2B2B"/>
-                </a:solidFill>
-                <a:latin typeface="Calibri"/>
-              </a:rPr>
-              <a:t> y en la Presentación del Curso. Revíselas hoy, con la plataforma abierta.</a:t>
-            </a:r>
-          </a:p>
-        </p:txBody>
-      </p:sp>
-      <p:sp>
-        <p:nvSpPr>
-          <p:cNvPr id="5" name="TextBox 4"/>
+              <a:t>Esta semana el aula sí espera:</a:t>
+            </a:r>
+            <a:r>
+              <a:rPr sz="1600" b="0" i="0">
+                <a:solidFill>
+                  <a:srgbClr val="2B2B2B"/>
+                </a:solidFill>
+                <a:latin typeface="Calibri"/>
+              </a:rPr>
+              <a:t> </a:t>
+            </a:r>
+            <a:r>
+              <a:rPr sz="1600" b="1" i="0">
+                <a:solidFill>
+                  <a:srgbClr val="2B2B2B"/>
+                </a:solidFill>
+                <a:latin typeface="Calibri"/>
+              </a:rPr>
+              <a:t>Autoevaluación</a:t>
+            </a:r>
+            <a:r>
+              <a:rPr sz="1600" b="0" i="0">
+                <a:solidFill>
+                  <a:srgbClr val="2B2B2B"/>
+                </a:solidFill>
+                <a:latin typeface="Calibri"/>
+              </a:rPr>
+              <a:t> (1,6%) y </a:t>
+            </a:r>
+            <a:r>
+              <a:rPr sz="1600" b="1" i="0">
+                <a:solidFill>
+                  <a:srgbClr val="2B2B2B"/>
+                </a:solidFill>
+                <a:latin typeface="Calibri"/>
+              </a:rPr>
+              <a:t>Coevaluación</a:t>
+            </a:r>
+            <a:r>
+              <a:rPr sz="1600" b="0" i="0">
+                <a:solidFill>
+                  <a:srgbClr val="2B2B2B"/>
+                </a:solidFill>
+                <a:latin typeface="Calibri"/>
+              </a:rPr>
+              <a:t> (1,6%). Eso se responde </a:t>
+            </a:r>
+            <a:r>
+              <a:rPr sz="1600" b="1" i="0">
+                <a:solidFill>
+                  <a:srgbClr val="2B2B2B"/>
+                </a:solidFill>
+                <a:latin typeface="Calibri"/>
+              </a:rPr>
+              <a:t>en </a:t>
+            </a:r>
+            <a:r>
+              <a:rPr sz="1600" b="0" i="0">
+                <a:solidFill>
+                  <a:srgbClr val="2B2B2B"/>
+                </a:solidFill>
+                <a:latin typeface="Calibri"/>
+              </a:rPr>
+              <a:t>CDigital</a:t>
+            </a:r>
+            <a:r>
+              <a:rPr sz="1600" b="1" i="0">
+                <a:solidFill>
+                  <a:srgbClr val="2B2B2B"/>
+                </a:solidFill>
+                <a:latin typeface="Calibri"/>
+              </a:rPr>
+              <a:t/>
+            </a:r>
+            <a:r>
+              <a:rPr sz="1600" b="0" i="0">
+                <a:solidFill>
+                  <a:srgbClr val="2B2B2B"/>
+                </a:solidFill>
+                <a:latin typeface="Calibri"/>
+              </a:rPr>
+              <a:t>, no se sube como archivo.</a:t>
+            </a:r>
+          </a:p>
+        </p:txBody>
+      </p:sp>
+      <p:sp>
+        <p:nvSpPr>
+          <p:cNvPr id="6" name="TextBox 5"/>
           <p:cNvSpPr txBox="1"/>
           <p:nvPr/>
         </p:nvSpPr>
@@ -5167,7 +5240,7 @@
                 </a:solidFill>
                 <a:latin typeface="Calibri"/>
               </a:rPr>
-              <a:t>Autoevaluación y coevaluación: qué son y cómo se diligencian (cont.)</a:t>
+              <a:t>Autoevaluación y coevaluación: qué son y cómo se diligencian</a:t>
             </a:r>
           </a:p>
         </p:txBody>
@@ -5206,7 +5279,7 @@
                 </a:solidFill>
                 <a:latin typeface="Calibri"/>
               </a:rPr>
-              <a:t>–   Son las notas más fáciles de perder del periodo: se pierden por </a:t>
+              <a:t>–   Son </a:t>
             </a:r>
             <a:r>
               <a:rPr sz="1600" b="1" i="0">
@@ -5215,7 +5288,7 @@
                 </a:solidFill>
                 <a:latin typeface="Calibri"/>
               </a:rPr>
-              <a:t>no entrar</a:t>
+              <a:t>dos ítems del corte 3</a:t>
             </a:r>
             <a:r>
               <a:rPr sz="1600" b="0" i="0">
@@ -5224,7 +5297,324 @@
                 </a:solidFill>
                 <a:latin typeface="Calibri"/>
               </a:rPr>
-              <a:t>, no por hacerlo mal.</a:t>
+              <a:t> con nota propia, y se </a:t>
+            </a:r>
+            <a:r>
+              <a:rPr sz="1600" b="1" i="0">
+                <a:solidFill>
+                  <a:srgbClr val="2B2B2B"/>
+                </a:solidFill>
+                <a:latin typeface="Calibri"/>
+              </a:rPr>
+              <a:t>abren hoy</a:t>
+            </a:r>
+            <a:r>
+              <a:rPr sz="1600" b="0" i="0">
+                <a:solidFill>
+                  <a:srgbClr val="2B2B2B"/>
+                </a:solidFill>
+                <a:latin typeface="Calibri"/>
+              </a:rPr>
+              <a:t> en CDigital. No son un trámite ni un formalismo.</a:t>
+            </a:r>
+          </a:p>
+          <a:p>
+            <a:pPr>
+              <a:spcAft>
+                <a:spcPts val="1000"/>
+              </a:spcAft>
+            </a:pPr>
+            <a:r>
+              <a:rPr sz="1600" b="0" i="0">
+                <a:solidFill>
+                  <a:srgbClr val="2B2B2B"/>
+                </a:solidFill>
+                <a:latin typeface="Calibri"/>
+              </a:rPr>
+              <a:t>–   </a:t>
+            </a:r>
+            <a:r>
+              <a:rPr sz="1600" b="1" i="0">
+                <a:solidFill>
+                  <a:srgbClr val="2B2B2B"/>
+                </a:solidFill>
+                <a:latin typeface="Calibri"/>
+              </a:rPr>
+              <a:t>Autoevaluación</a:t>
+            </a:r>
+            <a:r>
+              <a:rPr sz="1600" b="0" i="0">
+                <a:solidFill>
+                  <a:srgbClr val="2B2B2B"/>
+                </a:solidFill>
+                <a:latin typeface="Calibri"/>
+              </a:rPr>
+              <a:t> — un </a:t>
+            </a:r>
+            <a:r>
+              <a:rPr sz="1600" b="1" i="0">
+                <a:solidFill>
+                  <a:srgbClr val="2B2B2B"/>
+                </a:solidFill>
+                <a:latin typeface="Calibri"/>
+              </a:rPr>
+              <a:t>cuestionario</a:t>
+            </a:r>
+            <a:r>
+              <a:rPr sz="1600" b="0" i="0">
+                <a:solidFill>
+                  <a:srgbClr val="2B2B2B"/>
+                </a:solidFill>
+                <a:latin typeface="Calibri"/>
+              </a:rPr>
+              <a:t> que usted responde sobre su propio proceso.</a:t>
+            </a:r>
+          </a:p>
+          <a:p>
+            <a:pPr lvl="1">
+              <a:spcAft>
+                <a:spcPts val="600"/>
+              </a:spcAft>
+            </a:pPr>
+            <a:r>
+              <a:rPr sz="1500" b="0" i="0">
+                <a:solidFill>
+                  <a:srgbClr val="2B2B2B"/>
+                </a:solidFill>
+                <a:latin typeface="Calibri"/>
+              </a:rPr>
+              <a:t>●   No se trata de ponerse 5,0 ni de castigarse: se trata de </a:t>
+            </a:r>
+            <a:r>
+              <a:rPr sz="1500" b="1" i="0">
+                <a:solidFill>
+                  <a:srgbClr val="2B2B2B"/>
+                </a:solidFill>
+                <a:latin typeface="Calibri"/>
+              </a:rPr>
+              <a:t>argumentar</a:t>
+            </a:r>
+            <a:r>
+              <a:rPr sz="1500" b="0" i="0">
+                <a:solidFill>
+                  <a:srgbClr val="2B2B2B"/>
+                </a:solidFill>
+                <a:latin typeface="Calibri"/>
+              </a:rPr>
+              <a:t> con hechos del periodo.</a:t>
+            </a:r>
+          </a:p>
+          <a:p>
+            <a:pPr>
+              <a:spcAft>
+                <a:spcPts val="1000"/>
+              </a:spcAft>
+            </a:pPr>
+            <a:r>
+              <a:rPr sz="1600" b="0" i="0">
+                <a:solidFill>
+                  <a:srgbClr val="2B2B2B"/>
+                </a:solidFill>
+                <a:latin typeface="Calibri"/>
+              </a:rPr>
+              <a:t>–   </a:t>
+            </a:r>
+            <a:r>
+              <a:rPr sz="1600" b="1" i="0">
+                <a:solidFill>
+                  <a:srgbClr val="2B2B2B"/>
+                </a:solidFill>
+                <a:latin typeface="Calibri"/>
+              </a:rPr>
+              <a:t>Coevaluación</a:t>
+            </a:r>
+            <a:r>
+              <a:rPr sz="1600" b="0" i="0">
+                <a:solidFill>
+                  <a:srgbClr val="2B2B2B"/>
+                </a:solidFill>
+                <a:latin typeface="Calibri"/>
+              </a:rPr>
+              <a:t> — un </a:t>
+            </a:r>
+            <a:r>
+              <a:rPr sz="1600" b="1" i="0">
+                <a:solidFill>
+                  <a:srgbClr val="2B2B2B"/>
+                </a:solidFill>
+                <a:latin typeface="Calibri"/>
+              </a:rPr>
+              <a:t>foro</a:t>
+            </a:r>
+            <a:r>
+              <a:rPr sz="1600" b="0" i="0">
+                <a:solidFill>
+                  <a:srgbClr val="2B2B2B"/>
+                </a:solidFill>
+                <a:latin typeface="Calibri"/>
+              </a:rPr>
+              <a:t>: se </a:t>
+            </a:r>
+            <a:r>
+              <a:rPr sz="1600" b="1" i="0">
+                <a:solidFill>
+                  <a:srgbClr val="2B2B2B"/>
+                </a:solidFill>
+                <a:latin typeface="Calibri"/>
+              </a:rPr>
+              <a:t>participa</a:t>
+            </a:r>
+            <a:r>
+              <a:rPr sz="1600" b="0" i="0">
+                <a:solidFill>
+                  <a:srgbClr val="2B2B2B"/>
+                </a:solidFill>
+                <a:latin typeface="Calibri"/>
+              </a:rPr>
+              <a:t>, no se sube archivo.</a:t>
+            </a:r>
+          </a:p>
+          <a:p>
+            <a:pPr lvl="1">
+              <a:spcAft>
+                <a:spcPts val="600"/>
+              </a:spcAft>
+            </a:pPr>
+            <a:r>
+              <a:rPr sz="1500" b="0" i="0">
+                <a:solidFill>
+                  <a:srgbClr val="2B2B2B"/>
+                </a:solidFill>
+                <a:latin typeface="Calibri"/>
+              </a:rPr>
+              <a:t>●   Escriba sobre el trabajo de sus compañeros con los </a:t>
+            </a:r>
+            <a:r>
+              <a:rPr sz="1500" b="1" i="0">
+                <a:solidFill>
+                  <a:srgbClr val="2B2B2B"/>
+                </a:solidFill>
+                <a:latin typeface="Calibri"/>
+              </a:rPr>
+              <a:t>cuatro criterios de la rúbrica</a:t>
+            </a:r>
+            <a:r>
+              <a:rPr sz="1500" b="0" i="0">
+                <a:solidFill>
+                  <a:srgbClr val="2B2B2B"/>
+                </a:solidFill>
+                <a:latin typeface="Calibri"/>
+              </a:rPr>
+              <a:t> de hoy. Un comentario útil menciona algo concreto que el otro dijo.</a:t>
+            </a:r>
+          </a:p>
+          <a:p>
+            <a:pPr lvl="1">
+              <a:spcAft>
+                <a:spcPts val="600"/>
+              </a:spcAft>
+            </a:pPr>
+            <a:r>
+              <a:rPr sz="1500" b="0" i="0">
+                <a:solidFill>
+                  <a:srgbClr val="2B2B2B"/>
+                </a:solidFill>
+                <a:latin typeface="Calibri"/>
+              </a:rPr>
+              <a:t>●   "Buen trabajo" no es coevaluar. Y responder al comentario de otro cuenta: un foro es una conversación.</a:t>
+            </a:r>
+          </a:p>
+          <a:p>
+            <a:pPr>
+              <a:spcAft>
+                <a:spcPts val="1000"/>
+              </a:spcAft>
+            </a:pPr>
+            <a:r>
+              <a:rPr sz="1600" b="0" i="0">
+                <a:solidFill>
+                  <a:srgbClr val="2B2B2B"/>
+                </a:solidFill>
+                <a:latin typeface="Calibri"/>
+              </a:rPr>
+              <a:t>–   </a:t>
+            </a:r>
+            <a:r>
+              <a:rPr sz="1600" b="1" i="0">
+                <a:solidFill>
+                  <a:srgbClr val="2B2B2B"/>
+                </a:solidFill>
+                <a:latin typeface="Calibri"/>
+              </a:rPr>
+              <a:t>Dos advertencias operativas:</a:t>
+            </a:r>
+          </a:p>
+          <a:p>
+            <a:pPr lvl="1">
+              <a:spcAft>
+                <a:spcPts val="600"/>
+              </a:spcAft>
+            </a:pPr>
+            <a:r>
+              <a:rPr sz="1500" b="0" i="0">
+                <a:solidFill>
+                  <a:srgbClr val="2B2B2B"/>
+                </a:solidFill>
+                <a:latin typeface="Calibri"/>
+              </a:rPr>
+              <a:t>●   El foro exige </a:t>
+            </a:r>
+            <a:r>
+              <a:rPr sz="1500" b="1" i="0">
+                <a:solidFill>
+                  <a:srgbClr val="2B2B2B"/>
+                </a:solidFill>
+                <a:latin typeface="Calibri"/>
+              </a:rPr>
+              <a:t>participar dentro de la ventana</a:t>
+            </a:r>
+            <a:r>
+              <a:rPr sz="1500" b="0" i="0">
+                <a:solidFill>
+                  <a:srgbClr val="2B2B2B"/>
+                </a:solidFill>
+                <a:latin typeface="Calibri"/>
+              </a:rPr>
+              <a:t>: si se cierra, no hay archivo que lo reemplace.</a:t>
+            </a:r>
+          </a:p>
+          <a:p>
+            <a:pPr lvl="1">
+              <a:spcAft>
+                <a:spcPts val="600"/>
+              </a:spcAft>
+            </a:pPr>
+            <a:r>
+              <a:rPr sz="1500" b="0" i="0">
+                <a:solidFill>
+                  <a:srgbClr val="2B2B2B"/>
+                </a:solidFill>
+                <a:latin typeface="Calibri"/>
+              </a:rPr>
+              <a:t>●   </a:t>
+            </a:r>
+            <a:r>
+              <a:rPr sz="1500" b="1" i="0">
+                <a:solidFill>
+                  <a:srgbClr val="2B2B2B"/>
+                </a:solidFill>
+                <a:latin typeface="Calibri"/>
+              </a:rPr>
+              <a:t>Las fechas exactas de apertura y cierre están en CDigital</a:t>
+            </a:r>
+            <a:r>
+              <a:rPr sz="1500" b="0" i="0">
+                <a:solidFill>
+                  <a:srgbClr val="2B2B2B"/>
+                </a:solidFill>
+                <a:latin typeface="Calibri"/>
+              </a:rPr>
+              <a:t> y en la Presentación del Curso. Revíselas hoy, con la plataforma abierta.</a:t>
             </a:r>
           </a:p>
         </p:txBody>
@@ -5273,6 +5663,203 @@
 </file>
 
 <file path=ppt/slides/slide14.xml><?xml version="1.0" encoding="utf-8"?>
+<p:sld xmlns:a="http://schemas.openxmlformats.org/drawingml/2006/main" xmlns:p="http://schemas.openxmlformats.org/presentationml/2006/main" xmlns:r="http://schemas.openxmlformats.org/officeDocument/2006/relationships">
+  <p:cSld>
+    <p:bg>
+      <p:bgPr>
+        <a:solidFill>
+          <a:srgbClr val="FFFFFF"/>
+        </a:solidFill>
+        <a:effectLst/>
+      </p:bgPr>
+    </p:bg>
+    <p:spTree>
+      <p:nvGrpSpPr>
+        <p:cNvPr id="1" name=""/>
+        <p:cNvGrpSpPr/>
+        <p:nvPr/>
+      </p:nvGrpSpPr>
+      <p:grpSpPr/>
+      <p:sp>
+        <p:nvSpPr>
+          <p:cNvPr id="2" name="Rectangle 1"/>
+          <p:cNvSpPr/>
+          <p:nvPr/>
+        </p:nvSpPr>
+        <p:spPr>
+          <a:xfrm>
+            <a:off x="0" y="0"/>
+            <a:ext cx="12191695" cy="1188720"/>
+          </a:xfrm>
+          <a:prstGeom prst="rect">
+            <a:avLst/>
+          </a:prstGeom>
+          <a:solidFill>
+            <a:srgbClr val="0C2340"/>
+          </a:solidFill>
+          <a:ln>
+            <a:noFill/>
+          </a:ln>
+          <a:effectLst/>
+        </p:spPr>
+        <p:style>
+          <a:lnRef idx="1">
+            <a:schemeClr val="accent1"/>
+          </a:lnRef>
+          <a:fillRef idx="3">
+            <a:schemeClr val="accent1"/>
+          </a:fillRef>
+          <a:effectRef idx="2">
+            <a:schemeClr val="accent1"/>
+          </a:effectRef>
+          <a:fontRef idx="minor">
+            <a:schemeClr val="lt1"/>
+          </a:fontRef>
+        </p:style>
+        <p:txBody>
+          <a:bodyPr rtlCol="0" anchor="ctr"/>
+          <a:lstStyle/>
+          <a:p>
+            <a:pPr algn="ctr"/>
+          </a:p>
+        </p:txBody>
+      </p:sp>
+      <p:sp>
+        <p:nvSpPr>
+          <p:cNvPr id="3" name="TextBox 2"/>
+          <p:cNvSpPr txBox="1"/>
+          <p:nvPr/>
+        </p:nvSpPr>
+        <p:spPr>
+          <a:xfrm>
+            <a:off x="640080" y="0"/>
+            <a:ext cx="9082735" cy="1188720"/>
+          </a:xfrm>
+          <a:prstGeom prst="rect">
+            <a:avLst/>
+          </a:prstGeom>
+          <a:noFill/>
+        </p:spPr>
+        <p:txBody>
+          <a:bodyPr wrap="square" anchor="ctr" lIns="0" rIns="0" tIns="0" bIns="0">
+            <a:spAutoFit/>
+          </a:bodyPr>
+          <a:lstStyle/>
+          <a:p>
+            <a:pPr algn="ctr"/>
+            <a:r>
+              <a:rPr sz="2600" b="1" i="0">
+                <a:solidFill>
+                  <a:srgbClr val="FFFFFF"/>
+                </a:solidFill>
+                <a:latin typeface="Calibri"/>
+              </a:rPr>
+              <a:t>Autoevaluación y coevaluación: qué son y cómo se diligencian (cont.)</a:t>
+            </a:r>
+          </a:p>
+        </p:txBody>
+      </p:sp>
+      <p:sp>
+        <p:nvSpPr>
+          <p:cNvPr id="4" name="TextBox 3"/>
+          <p:cNvSpPr txBox="1"/>
+          <p:nvPr/>
+        </p:nvSpPr>
+        <p:spPr>
+          <a:xfrm>
+            <a:off x="640080" y="1691639"/>
+            <a:ext cx="10911535" cy="4617720"/>
+          </a:xfrm>
+          <a:prstGeom prst="rect">
+            <a:avLst/>
+          </a:prstGeom>
+          <a:noFill/>
+        </p:spPr>
+        <p:txBody>
+          <a:bodyPr wrap="square" anchor="t" lIns="0" rIns="0" tIns="0" bIns="0">
+            <a:spAutoFit/>
+          </a:bodyPr>
+          <a:lstStyle/>
+          <a:p>
+            <a:pPr>
+              <a:spcAft>
+                <a:spcPts val="1000"/>
+              </a:spcAft>
+            </a:pPr>
+            <a:r>
+              <a:rPr sz="1600" b="0" i="0">
+                <a:solidFill>
+                  <a:srgbClr val="2B2B2B"/>
+                </a:solidFill>
+                <a:latin typeface="Calibri"/>
+              </a:rPr>
+              <a:t>–   Son las notas más fáciles de perder del periodo: se pierden por </a:t>
+            </a:r>
+            <a:r>
+              <a:rPr sz="1600" b="1" i="0">
+                <a:solidFill>
+                  <a:srgbClr val="2B2B2B"/>
+                </a:solidFill>
+                <a:latin typeface="Calibri"/>
+              </a:rPr>
+              <a:t>no entrar</a:t>
+            </a:r>
+            <a:r>
+              <a:rPr sz="1600" b="0" i="0">
+                <a:solidFill>
+                  <a:srgbClr val="2B2B2B"/>
+                </a:solidFill>
+                <a:latin typeface="Calibri"/>
+              </a:rPr>
+              <a:t>, no por hacerlo mal.</a:t>
+            </a:r>
+          </a:p>
+        </p:txBody>
+      </p:sp>
+      <p:sp>
+        <p:nvSpPr>
+          <p:cNvPr id="5" name="TextBox 4"/>
+          <p:cNvSpPr txBox="1"/>
+          <p:nvPr/>
+        </p:nvSpPr>
+        <p:spPr>
+          <a:xfrm>
+            <a:off x="11094415" y="6446520"/>
+            <a:ext cx="548640" cy="274320"/>
+          </a:xfrm>
+          <a:prstGeom prst="rect">
+            <a:avLst/>
+          </a:prstGeom>
+          <a:noFill/>
+        </p:spPr>
+        <p:txBody>
+          <a:bodyPr wrap="square" anchor="t" lIns="0" rIns="0" tIns="0" bIns="0">
+            <a:spAutoFit/>
+          </a:bodyPr>
+          <a:lstStyle/>
+          <a:p>
+            <a:pPr algn="r"/>
+            <a:r>
+              <a:rPr sz="1000" b="1" i="0">
+                <a:solidFill>
+                  <a:srgbClr val="8F989D"/>
+                </a:solidFill>
+                <a:latin typeface="Calibri"/>
+              </a:rPr>
+              <a:t>14</a:t>
+            </a:r>
+          </a:p>
+        </p:txBody>
+      </p:sp>
+    </p:spTree>
+  </p:cSld>
+  <p:clrMapOvr>
+    <a:masterClrMapping/>
+  </p:clrMapOvr>
+</p:sld>
+</file>
+
+<file path=ppt/slides/slide15.xml><?xml version="1.0" encoding="utf-8"?>
 <p:sld xmlns:a="http://schemas.openxmlformats.org/drawingml/2006/main" xmlns:p="http://schemas.openxmlformats.org/presentationml/2006/main" xmlns:r="http://schemas.openxmlformats.org/officeDocument/2006/relationships">
   <p:cSld>
     <p:bg>
@@ -5833,7 +6420,7 @@
                 </a:solidFill>
                 <a:latin typeface="Calibri"/>
               </a:rPr>
-              <a:t>14</a:t>
+              <a:t>15</a:t>
             </a:r>
           </a:p>
         </p:txBody>
@@ -5846,7 +6433,7 @@
 </p:sld>
 </file>
 
-<file path=ppt/slides/slide15.xml><?xml version="1.0" encoding="utf-8"?>
+<file path=ppt/slides/slide16.xml><?xml version="1.0" encoding="utf-8"?>
 <p:sld xmlns:a="http://schemas.openxmlformats.org/drawingml/2006/main" xmlns:p="http://schemas.openxmlformats.org/presentationml/2006/main" xmlns:r="http://schemas.openxmlformats.org/officeDocument/2006/relationships">
   <p:cSld>
     <p:bg>
@@ -6320,7 +6907,7 @@
                 </a:solidFill>
                 <a:latin typeface="Calibri"/>
               </a:rPr>
-              <a:t>15</a:t>
+              <a:t>16</a:t>
             </a:r>
           </a:p>
         </p:txBody>
@@ -6333,7 +6920,7 @@
 </p:sld>
 </file>
 
-<file path=ppt/slides/slide16.xml><?xml version="1.0" encoding="utf-8"?>
+<file path=ppt/slides/slide17.xml><?xml version="1.0" encoding="utf-8"?>
 <p:sld xmlns:a="http://schemas.openxmlformats.org/drawingml/2006/main" xmlns:p="http://schemas.openxmlformats.org/presentationml/2006/main" xmlns:r="http://schemas.openxmlformats.org/officeDocument/2006/relationships">
   <p:cSld>
     <p:bg>
@@ -6780,7 +7367,7 @@
                 </a:solidFill>
                 <a:latin typeface="Calibri"/>
               </a:rPr>
-              <a:t>16</a:t>
+              <a:t>17</a:t>
             </a:r>
           </a:p>
         </p:txBody>
@@ -6793,7 +7380,7 @@
 </p:sld>
 </file>
 
-<file path=ppt/slides/slide17.xml><?xml version="1.0" encoding="utf-8"?>
+<file path=ppt/slides/slide18.xml><?xml version="1.0" encoding="utf-8"?>
 <p:sld xmlns:a="http://schemas.openxmlformats.org/drawingml/2006/main" xmlns:p="http://schemas.openxmlformats.org/presentationml/2006/main" xmlns:r="http://schemas.openxmlformats.org/officeDocument/2006/relationships">
   <p:cSld>
     <p:bg>
@@ -7283,7 +7870,7 @@
                 </a:solidFill>
                 <a:latin typeface="Calibri"/>
               </a:rPr>
-              <a:t>17</a:t>
+              <a:t>18</a:t>
             </a:r>
           </a:p>
         </p:txBody>
@@ -7296,7 +7883,7 @@
 </p:sld>
 </file>
 
-<file path=ppt/slides/slide18.xml><?xml version="1.0" encoding="utf-8"?>
+<file path=ppt/slides/slide19.xml><?xml version="1.0" encoding="utf-8"?>
 <p:sld xmlns:a="http://schemas.openxmlformats.org/drawingml/2006/main" xmlns:p="http://schemas.openxmlformats.org/presentationml/2006/main" xmlns:r="http://schemas.openxmlformats.org/officeDocument/2006/relationships">
   <p:cSld>
     <p:bg>
@@ -7526,7 +8113,7 @@
                 </a:solidFill>
                 <a:latin typeface="Calibri"/>
               </a:rPr>
-              <a:t>18</a:t>
+              <a:t>19</a:t>
             </a:r>
           </a:p>
         </p:txBody>
@@ -7539,7 +8126,7 @@
 </p:sld>
 </file>
 
-<file path=ppt/slides/slide19.xml><?xml version="1.0" encoding="utf-8"?>
+<file path=ppt/slides/slide2.xml><?xml version="1.0" encoding="utf-8"?>
 <p:sld xmlns:a="http://schemas.openxmlformats.org/drawingml/2006/main" xmlns:p="http://schemas.openxmlformats.org/presentationml/2006/main" xmlns:r="http://schemas.openxmlformats.org/officeDocument/2006/relationships">
   <p:cSld>
     <p:bg>
@@ -7631,7 +8218,7 @@
                 </a:solidFill>
                 <a:latin typeface="Calibri"/>
               </a:rPr>
-              <a:t>Cierre del curso · últimos pendientes</a:t>
+              <a:t>El artículo ya se entregó: hoy se sostiene en voz alta</a:t>
             </a:r>
           </a:p>
         </p:txBody>
@@ -7670,7 +8257,7 @@
                 </a:solidFill>
                 <a:latin typeface="Calibri"/>
               </a:rPr>
-              <a:t>–   </a:t>
+              <a:t>–   La </a:t>
             </a:r>
             <a:r>
               <a:rPr sz="1600" b="1" i="0">
@@ -7679,7 +8266,52 @@
                 </a:solidFill>
                 <a:latin typeface="Calibri"/>
               </a:rPr>
-              <a:t>Tres ideas para llevarse del curso completo:</a:t>
+              <a:t>ACA Final</a:t>
+            </a:r>
+            <a:r>
+              <a:rPr sz="1600" b="0" i="0">
+                <a:solidFill>
+                  <a:srgbClr val="2B2B2B"/>
+                </a:solidFill>
+                <a:latin typeface="Calibri"/>
+              </a:rPr>
+              <a:t> —el artículo— ya cerró, y el </a:t>
+            </a:r>
+            <a:r>
+              <a:rPr sz="1600" b="1" i="0">
+                <a:solidFill>
+                  <a:srgbClr val="2B2B2B"/>
+                </a:solidFill>
+                <a:latin typeface="Calibri"/>
+              </a:rPr>
+              <a:t>Quiz 3</a:t>
+            </a:r>
+            <a:r>
+              <a:rPr sz="1600" b="0" i="0">
+                <a:solidFill>
+                  <a:srgbClr val="2B2B2B"/>
+                </a:solidFill>
+                <a:latin typeface="Calibri"/>
+              </a:rPr>
+              <a:t> también. Esta sesión </a:t>
+            </a:r>
+            <a:r>
+              <a:rPr sz="1600" b="1" i="0">
+                <a:solidFill>
+                  <a:srgbClr val="2B2B2B"/>
+                </a:solidFill>
+                <a:latin typeface="Calibri"/>
+              </a:rPr>
+              <a:t>no tiene evaluación de contenido nueva</a:t>
+            </a:r>
+            <a:r>
+              <a:rPr sz="1600" b="0" i="0">
+                <a:solidFill>
+                  <a:srgbClr val="2B2B2B"/>
+                </a:solidFill>
+                <a:latin typeface="Calibri"/>
+              </a:rPr>
+              <a:t>.</a:t>
             </a:r>
           </a:p>
           <a:p>
@@ -7695,7 +8327,7 @@
                 </a:solidFill>
                 <a:latin typeface="Calibri"/>
               </a:rPr>
-              <a:t>●   1. Investigar </a:t>
+              <a:t>●   Eso no la hace menos importante: es la única vez en el periodo en que su trabajo se </a:t>
             </a:r>
             <a:r>
               <a:rPr sz="1500" b="1" i="0">
@@ -7704,7 +8336,7 @@
                 </a:solidFill>
                 <a:latin typeface="Calibri"/>
               </a:rPr>
-              <a:t>no es tener un tema</a:t>
+              <a:t>escucha</a:t>
             </a:r>
             <a:r>
               <a:rPr sz="1500" b="0" i="0">
@@ -7713,7 +8345,23 @@
                 </a:solidFill>
                 <a:latin typeface="Calibri"/>
               </a:rPr>
-              <a:t>: es delimitar un problema real y sostener una pregunta con evidencia.</a:t>
+              <a:t> y no solo se lee.</a:t>
+            </a:r>
+          </a:p>
+          <a:p>
+            <a:pPr>
+              <a:spcAft>
+                <a:spcPts val="1000"/>
+              </a:spcAft>
+            </a:pPr>
+            <a:r>
+              <a:rPr sz="1600" b="0" i="0">
+                <a:solidFill>
+                  <a:srgbClr val="2B2B2B"/>
+                </a:solidFill>
+                <a:latin typeface="Calibri"/>
+              </a:rPr>
+              <a:t>–   Lo que sí pasa hoy, en este orden:</a:t>
             </a:r>
           </a:p>
           <a:p>
@@ -7729,7 +8377,7 @@
                 </a:solidFill>
                 <a:latin typeface="Calibri"/>
               </a:rPr>
-              <a:t>●   2. Una afirmación </a:t>
+              <a:t>●   </a:t>
             </a:r>
             <a:r>
               <a:rPr sz="1500" b="1" i="0">
@@ -7738,7 +8386,7 @@
                 </a:solidFill>
                 <a:latin typeface="Calibri"/>
               </a:rPr>
-              <a:t>sin cifra ni cita</a:t>
+              <a:t>Socialización</a:t>
             </a:r>
             <a:r>
               <a:rPr sz="1500" b="0" i="0">
@@ -7747,7 +8395,7 @@
                 </a:solidFill>
                 <a:latin typeface="Calibri"/>
               </a:rPr>
-              <a:t> es una opinión, por bien redactada que esté.</a:t>
+              <a:t> — cada quien cuenta su artículo en cuatro minutos y responde preguntas.</a:t>
             </a:r>
           </a:p>
           <a:p>
@@ -7763,7 +8411,7 @@
                 </a:solidFill>
                 <a:latin typeface="Calibri"/>
               </a:rPr>
-              <a:t>●   3. El marco </a:t>
+              <a:t>●   </a:t>
             </a:r>
             <a:r>
               <a:rPr sz="1500" b="1" i="0">
@@ -7772,7 +8420,7 @@
                 </a:solidFill>
                 <a:latin typeface="Calibri"/>
               </a:rPr>
-              <a:t>no decora</a:t>
+              <a:t>Retroalimentación entre pares</a:t>
             </a:r>
             <a:r>
               <a:rPr sz="1500" b="0" i="0">
@@ -7781,32 +8429,7 @@
                 </a:solidFill>
                 <a:latin typeface="Calibri"/>
               </a:rPr>
-              <a:t>: si un párrafo no vuelve a su pregunta, sobra.</a:t>
-            </a:r>
-          </a:p>
-          <a:p>
-            <a:pPr>
-              <a:spcAft>
-                <a:spcPts val="1000"/>
-              </a:spcAft>
-            </a:pPr>
-            <a:r>
-              <a:rPr sz="1600" b="0" i="0">
-                <a:solidFill>
-                  <a:srgbClr val="2B2B2B"/>
-                </a:solidFill>
-                <a:latin typeface="Calibri"/>
-              </a:rPr>
-              <a:t>–   </a:t>
-            </a:r>
-            <a:r>
-              <a:rPr sz="1600" b="1" i="0">
-                <a:solidFill>
-                  <a:srgbClr val="2B2B2B"/>
-                </a:solidFill>
-                <a:latin typeface="Calibri"/>
-              </a:rPr>
-              <a:t>Pendientes de esta semana, y son los últimos:</a:t>
+              <a:t> — con una fórmula, no con "me gustó".</a:t>
             </a:r>
           </a:p>
           <a:p>
@@ -7822,7 +8445,7 @@
                 </a:solidFill>
                 <a:latin typeface="Calibri"/>
               </a:rPr>
-              <a:t>●   Diligenciar la </a:t>
+              <a:t>●   </a:t>
             </a:r>
             <a:r>
               <a:rPr sz="1500" b="1" i="0">
@@ -7831,6 +8454,24 @@
                 </a:solidFill>
                 <a:latin typeface="Calibri"/>
               </a:rPr>
+              <a:t>Cierre</a:t>
+            </a:r>
+            <a:r>
+              <a:rPr sz="1500" b="0" i="0">
+                <a:solidFill>
+                  <a:srgbClr val="2B2B2B"/>
+                </a:solidFill>
+                <a:latin typeface="Calibri"/>
+              </a:rPr>
+              <a:t> — </a:t>
+            </a:r>
+            <a:r>
+              <a:rPr sz="1500" b="1" i="0">
+                <a:solidFill>
+                  <a:srgbClr val="2B2B2B"/>
+                </a:solidFill>
+                <a:latin typeface="Calibri"/>
+              </a:rPr>
               <a:t>autoevaluación</a:t>
             </a:r>
             <a:r>
@@ -7840,7 +8481,7 @@
                 </a:solidFill>
                 <a:latin typeface="Calibri"/>
               </a:rPr>
-              <a:t> (cuestionario) y participar en la </a:t>
+              <a:t> y </a:t>
             </a:r>
             <a:r>
               <a:rPr sz="1500" b="1" i="0">
@@ -7858,7 +8499,7 @@
                 </a:solidFill>
                 <a:latin typeface="Calibri"/>
               </a:rPr>
-              <a:t> (foro) dentro de su ventana en CDigital.</a:t>
+              <a:t>, que se abren hoy en CDigital.</a:t>
             </a:r>
           </a:p>
           <a:p>
@@ -7874,7 +8515,7 @@
                 </a:solidFill>
                 <a:latin typeface="Calibri"/>
               </a:rPr>
-              <a:t>●   Aplicar la </a:t>
+              <a:t>●   </a:t>
             </a:r>
             <a:r>
               <a:rPr sz="1500" b="1" i="0">
@@ -7883,7 +8524,7 @@
                 </a:solidFill>
                 <a:latin typeface="Calibri"/>
               </a:rPr>
-              <a:t>lista de tres ajustes</a:t>
+              <a:t>Ruta</a:t>
             </a:r>
             <a:r>
               <a:rPr sz="1500" b="0" i="0">
@@ -7892,57 +8533,7 @@
                 </a:solidFill>
                 <a:latin typeface="Calibri"/>
               </a:rPr>
-              <a:t> del taller a su documento y guardarlo con sus fichas de lectura.</a:t>
-            </a:r>
-          </a:p>
-          <a:p>
-            <a:pPr lvl="1">
-              <a:spcAft>
-                <a:spcPts val="600"/>
-              </a:spcAft>
-            </a:pPr>
-            <a:r>
-              <a:rPr sz="1500" b="0" i="0">
-                <a:solidFill>
-                  <a:srgbClr val="2B2B2B"/>
-                </a:solidFill>
-                <a:latin typeface="Calibri"/>
-              </a:rPr>
-              <a:t>●   Revisar sus notas en el libro de calificaciones y </a:t>
-            </a:r>
-            <a:r>
-              <a:rPr sz="1500" b="1" i="0">
-                <a:solidFill>
-                  <a:srgbClr val="2B2B2B"/>
-                </a:solidFill>
-                <a:latin typeface="Calibri"/>
-              </a:rPr>
-              <a:t>escribir al Docente antes del cierre</a:t>
-            </a:r>
-            <a:r>
-              <a:rPr sz="1500" b="0" i="0">
-                <a:solidFill>
-                  <a:srgbClr val="2B2B2B"/>
-                </a:solidFill>
-                <a:latin typeface="Calibri"/>
-              </a:rPr>
-              <a:t> si algo no cuadra. Después del cierre ya no hay margen.</a:t>
-            </a:r>
-          </a:p>
-          <a:p>
-            <a:pPr>
-              <a:spcAft>
-                <a:spcPts val="1000"/>
-              </a:spcAft>
-            </a:pPr>
-            <a:r>
-              <a:rPr sz="1600" b="0" i="0">
-                <a:solidFill>
-                  <a:srgbClr val="2B2B2B"/>
-                </a:solidFill>
-                <a:latin typeface="Calibri"/>
-              </a:rPr>
-              <a:t>–   Plataforma del curso: [URL CDigital — campus del curso pendiente]</a:t>
+              <a:t> — qué hacer con este artículo después del periodo: semillero, trabajo de grado, publicación.</a:t>
             </a:r>
           </a:p>
         </p:txBody>
@@ -7977,7 +8568,7 @@
                 </a:solidFill>
                 <a:latin typeface="Calibri"/>
               </a:rPr>
-              <a:t>19</a:t>
+              <a:t>2</a:t>
             </a:r>
           </a:p>
         </p:txBody>
@@ -7990,7 +8581,7 @@
 </p:sld>
 </file>
 
-<file path=ppt/slides/slide2.xml><?xml version="1.0" encoding="utf-8"?>
+<file path=ppt/slides/slide20.xml><?xml version="1.0" encoding="utf-8"?>
 <p:sld xmlns:a="http://schemas.openxmlformats.org/drawingml/2006/main" xmlns:p="http://schemas.openxmlformats.org/presentationml/2006/main" xmlns:r="http://schemas.openxmlformats.org/officeDocument/2006/relationships">
   <p:cSld>
     <p:bg>
@@ -8082,7 +8673,7 @@
                 </a:solidFill>
                 <a:latin typeface="Calibri"/>
               </a:rPr>
-              <a:t>El artículo ya se entregó: hoy se sostiene en voz alta</a:t>
+              <a:t>Cierre del curso · últimos pendientes</a:t>
             </a:r>
           </a:p>
         </p:txBody>
@@ -8121,7 +8712,7 @@
                 </a:solidFill>
                 <a:latin typeface="Calibri"/>
               </a:rPr>
-              <a:t>–   La </a:t>
+              <a:t>–   </a:t>
             </a:r>
             <a:r>
               <a:rPr sz="1600" b="1" i="0">
@@ -8130,52 +8721,7 @@
                 </a:solidFill>
                 <a:latin typeface="Calibri"/>
               </a:rPr>
-              <a:t>ACA Final</a:t>
-            </a:r>
-            <a:r>
-              <a:rPr sz="1600" b="0" i="0">
-                <a:solidFill>
-                  <a:srgbClr val="2B2B2B"/>
-                </a:solidFill>
-                <a:latin typeface="Calibri"/>
-              </a:rPr>
-              <a:t> —el artículo— ya cerró, y el </a:t>
-            </a:r>
-            <a:r>
-              <a:rPr sz="1600" b="1" i="0">
-                <a:solidFill>
-                  <a:srgbClr val="2B2B2B"/>
-                </a:solidFill>
-                <a:latin typeface="Calibri"/>
-              </a:rPr>
-              <a:t>Quiz 3</a:t>
-            </a:r>
-            <a:r>
-              <a:rPr sz="1600" b="0" i="0">
-                <a:solidFill>
-                  <a:srgbClr val="2B2B2B"/>
-                </a:solidFill>
-                <a:latin typeface="Calibri"/>
-              </a:rPr>
-              <a:t> también. Esta sesión </a:t>
-            </a:r>
-            <a:r>
-              <a:rPr sz="1600" b="1" i="0">
-                <a:solidFill>
-                  <a:srgbClr val="2B2B2B"/>
-                </a:solidFill>
-                <a:latin typeface="Calibri"/>
-              </a:rPr>
-              <a:t>no tiene evaluación de contenido nueva</a:t>
-            </a:r>
-            <a:r>
-              <a:rPr sz="1600" b="0" i="0">
-                <a:solidFill>
-                  <a:srgbClr val="2B2B2B"/>
-                </a:solidFill>
-                <a:latin typeface="Calibri"/>
-              </a:rPr>
-              <a:t>.</a:t>
+              <a:t>Tres ideas para llevarse del curso completo:</a:t>
             </a:r>
           </a:p>
           <a:p>
@@ -8191,7 +8737,7 @@
                 </a:solidFill>
                 <a:latin typeface="Calibri"/>
               </a:rPr>
-              <a:t>●   Eso no la hace menos importante: es la única vez en el periodo en que su trabajo se </a:t>
+              <a:t>●   1. Investigar </a:t>
             </a:r>
             <a:r>
               <a:rPr sz="1500" b="1" i="0">
@@ -8200,7 +8746,7 @@
                 </a:solidFill>
                 <a:latin typeface="Calibri"/>
               </a:rPr>
-              <a:t>escucha</a:t>
+              <a:t>no es tener un tema</a:t>
             </a:r>
             <a:r>
               <a:rPr sz="1500" b="0" i="0">
@@ -8209,7 +8755,75 @@
                 </a:solidFill>
                 <a:latin typeface="Calibri"/>
               </a:rPr>
-              <a:t> y no solo se lee.</a:t>
+              <a:t>: es delimitar un problema real y sostener una pregunta con evidencia.</a:t>
+            </a:r>
+          </a:p>
+          <a:p>
+            <a:pPr lvl="1">
+              <a:spcAft>
+                <a:spcPts val="600"/>
+              </a:spcAft>
+            </a:pPr>
+            <a:r>
+              <a:rPr sz="1500" b="0" i="0">
+                <a:solidFill>
+                  <a:srgbClr val="2B2B2B"/>
+                </a:solidFill>
+                <a:latin typeface="Calibri"/>
+              </a:rPr>
+              <a:t>●   2. Una afirmación </a:t>
+            </a:r>
+            <a:r>
+              <a:rPr sz="1500" b="1" i="0">
+                <a:solidFill>
+                  <a:srgbClr val="2B2B2B"/>
+                </a:solidFill>
+                <a:latin typeface="Calibri"/>
+              </a:rPr>
+              <a:t>sin cifra ni cita</a:t>
+            </a:r>
+            <a:r>
+              <a:rPr sz="1500" b="0" i="0">
+                <a:solidFill>
+                  <a:srgbClr val="2B2B2B"/>
+                </a:solidFill>
+                <a:latin typeface="Calibri"/>
+              </a:rPr>
+              <a:t> es una opinión, por bien redactada que esté.</a:t>
+            </a:r>
+          </a:p>
+          <a:p>
+            <a:pPr lvl="1">
+              <a:spcAft>
+                <a:spcPts val="600"/>
+              </a:spcAft>
+            </a:pPr>
+            <a:r>
+              <a:rPr sz="1500" b="0" i="0">
+                <a:solidFill>
+                  <a:srgbClr val="2B2B2B"/>
+                </a:solidFill>
+                <a:latin typeface="Calibri"/>
+              </a:rPr>
+              <a:t>●   3. El marco </a:t>
+            </a:r>
+            <a:r>
+              <a:rPr sz="1500" b="1" i="0">
+                <a:solidFill>
+                  <a:srgbClr val="2B2B2B"/>
+                </a:solidFill>
+                <a:latin typeface="Calibri"/>
+              </a:rPr>
+              <a:t>no decora</a:t>
+            </a:r>
+            <a:r>
+              <a:rPr sz="1500" b="0" i="0">
+                <a:solidFill>
+                  <a:srgbClr val="2B2B2B"/>
+                </a:solidFill>
+                <a:latin typeface="Calibri"/>
+              </a:rPr>
+              <a:t>: si un párrafo no vuelve a su pregunta, sobra.</a:t>
             </a:r>
           </a:p>
           <a:p>
@@ -8225,7 +8839,16 @@
                 </a:solidFill>
                 <a:latin typeface="Calibri"/>
               </a:rPr>
-              <a:t>–   Lo que sí pasa hoy, en este orden:</a:t>
+              <a:t>–   </a:t>
+            </a:r>
+            <a:r>
+              <a:rPr sz="1600" b="1" i="0">
+                <a:solidFill>
+                  <a:srgbClr val="2B2B2B"/>
+                </a:solidFill>
+                <a:latin typeface="Calibri"/>
+              </a:rPr>
+              <a:t>Pendientes de esta semana, y son los últimos:</a:t>
             </a:r>
           </a:p>
           <a:p>
@@ -8241,7 +8864,7 @@
                 </a:solidFill>
                 <a:latin typeface="Calibri"/>
               </a:rPr>
-              <a:t>●   </a:t>
+              <a:t>●   Diligenciar la </a:t>
             </a:r>
             <a:r>
               <a:rPr sz="1500" b="1" i="0">
@@ -8250,7 +8873,7 @@
                 </a:solidFill>
                 <a:latin typeface="Calibri"/>
               </a:rPr>
-              <a:t>Socialización</a:t>
+              <a:t>autoevaluación</a:t>
             </a:r>
             <a:r>
               <a:rPr sz="1500" b="0" i="0">
@@ -8259,7 +8882,25 @@
                 </a:solidFill>
                 <a:latin typeface="Calibri"/>
               </a:rPr>
-              <a:t> — cada quien cuenta su artículo en cuatro minutos y responde preguntas.</a:t>
+              <a:t> (cuestionario) y participar en la </a:t>
+            </a:r>
+            <a:r>
+              <a:rPr sz="1500" b="1" i="0">
+                <a:solidFill>
+                  <a:srgbClr val="2B2B2B"/>
+                </a:solidFill>
+                <a:latin typeface="Calibri"/>
+              </a:rPr>
+              <a:t>coevaluación</a:t>
+            </a:r>
+            <a:r>
+              <a:rPr sz="1500" b="0" i="0">
+                <a:solidFill>
+                  <a:srgbClr val="2B2B2B"/>
+                </a:solidFill>
+                <a:latin typeface="Calibri"/>
+              </a:rPr>
+              <a:t> (foro) dentro de su ventana en CDigital.</a:t>
             </a:r>
           </a:p>
           <a:p>
@@ -8275,7 +8916,7 @@
                 </a:solidFill>
                 <a:latin typeface="Calibri"/>
               </a:rPr>
-              <a:t>●   </a:t>
+              <a:t>●   Aplicar la </a:t>
             </a:r>
             <a:r>
               <a:rPr sz="1500" b="1" i="0">
@@ -8284,7 +8925,7 @@
                 </a:solidFill>
                 <a:latin typeface="Calibri"/>
               </a:rPr>
-              <a:t>Retroalimentación entre pares</a:t>
+              <a:t>lista de tres ajustes</a:t>
             </a:r>
             <a:r>
               <a:rPr sz="1500" b="0" i="0">
@@ -8293,7 +8934,7 @@
                 </a:solidFill>
                 <a:latin typeface="Calibri"/>
               </a:rPr>
-              <a:t> — con una fórmula, no con "me gustó".</a:t>
+              <a:t> del taller a su documento y guardarlo con sus fichas de lectura.</a:t>
             </a:r>
           </a:p>
           <a:p>
@@ -8309,7 +8950,7 @@
                 </a:solidFill>
                 <a:latin typeface="Calibri"/>
               </a:rPr>
-              <a:t>●   </a:t>
+              <a:t>●   Revisar sus notas en el libro de calificaciones y </a:t>
             </a:r>
             <a:r>
               <a:rPr sz="1500" b="1" i="0">
@@ -8318,7 +8959,7 @@
                 </a:solidFill>
                 <a:latin typeface="Calibri"/>
               </a:rPr>
-              <a:t>Cierre</a:t>
+              <a:t>escribir al Docente antes del cierre</a:t>
             </a:r>
             <a:r>
               <a:rPr sz="1500" b="0" i="0">
@@ -8327,77 +8968,23 @@
                 </a:solidFill>
                 <a:latin typeface="Calibri"/>
               </a:rPr>
-              <a:t> — </a:t>
-            </a:r>
-            <a:r>
-              <a:rPr sz="1500" b="1" i="0">
-                <a:solidFill>
-                  <a:srgbClr val="2B2B2B"/>
-                </a:solidFill>
-                <a:latin typeface="Calibri"/>
-              </a:rPr>
-              <a:t>autoevaluación</a:t>
-            </a:r>
-            <a:r>
-              <a:rPr sz="1500" b="0" i="0">
-                <a:solidFill>
-                  <a:srgbClr val="2B2B2B"/>
-                </a:solidFill>
-                <a:latin typeface="Calibri"/>
-              </a:rPr>
-              <a:t> y </a:t>
-            </a:r>
-            <a:r>
-              <a:rPr sz="1500" b="1" i="0">
-                <a:solidFill>
-                  <a:srgbClr val="2B2B2B"/>
-                </a:solidFill>
-                <a:latin typeface="Calibri"/>
-              </a:rPr>
-              <a:t>coevaluación</a:t>
-            </a:r>
-            <a:r>
-              <a:rPr sz="1500" b="0" i="0">
-                <a:solidFill>
-                  <a:srgbClr val="2B2B2B"/>
-                </a:solidFill>
-                <a:latin typeface="Calibri"/>
-              </a:rPr>
-              <a:t>, que se abren hoy en CDigital.</a:t>
-            </a:r>
-          </a:p>
-          <a:p>
-            <a:pPr lvl="1">
+              <a:t> si algo no cuadra. Después del cierre ya no hay margen.</a:t>
+            </a:r>
+          </a:p>
+          <a:p>
+            <a:pPr>
               <a:spcAft>
-                <a:spcPts val="600"/>
+                <a:spcPts val="1000"/>
               </a:spcAft>
             </a:pPr>
             <a:r>
-              <a:rPr sz="1500" b="0" i="0">
-                <a:solidFill>
-                  <a:srgbClr val="2B2B2B"/>
-                </a:solidFill>
-                <a:latin typeface="Calibri"/>
-              </a:rPr>
-              <a:t>●   </a:t>
-            </a:r>
-            <a:r>
-              <a:rPr sz="1500" b="1" i="0">
-                <a:solidFill>
-                  <a:srgbClr val="2B2B2B"/>
-                </a:solidFill>
-                <a:latin typeface="Calibri"/>
-              </a:rPr>
-              <a:t>Ruta</a:t>
-            </a:r>
-            <a:r>
-              <a:rPr sz="1500" b="0" i="0">
-                <a:solidFill>
-                  <a:srgbClr val="2B2B2B"/>
-                </a:solidFill>
-                <a:latin typeface="Calibri"/>
-              </a:rPr>
-              <a:t> — qué hacer con este artículo después del periodo: semillero, trabajo de grado, publicación.</a:t>
+              <a:rPr sz="1600" b="0" i="0">
+                <a:solidFill>
+                  <a:srgbClr val="2B2B2B"/>
+                </a:solidFill>
+                <a:latin typeface="Calibri"/>
+              </a:rPr>
+              <a:t>–   Plataforma del curso: https://cdigital.cun.edu.co/course/view.php?id=111070</a:t>
             </a:r>
           </a:p>
         </p:txBody>
@@ -8432,7 +9019,7 @@
                 </a:solidFill>
                 <a:latin typeface="Calibri"/>
               </a:rPr>
-              <a:t>2</a:t>
+              <a:t>20</a:t>
             </a:r>
           </a:p>
         </p:txBody>
@@ -8445,7 +9032,7 @@
 </p:sld>
 </file>
 
-<file path=ppt/slides/slide20.xml><?xml version="1.0" encoding="utf-8"?>
+<file path=ppt/slides/slide21.xml><?xml version="1.0" encoding="utf-8"?>
 <p:sld xmlns:a="http://schemas.openxmlformats.org/drawingml/2006/main" xmlns:p="http://schemas.openxmlformats.org/presentationml/2006/main" xmlns:r="http://schemas.openxmlformats.org/officeDocument/2006/relationships">
   <p:cSld>
     <p:bg>
@@ -8620,7 +9207,7 @@
                 </a:solidFill>
                 <a:latin typeface="Calibri"/>
               </a:rPr>
-              <a:t>20</a:t>
+              <a:t>21</a:t>
             </a:r>
           </a:p>
         </p:txBody>
@@ -8633,7 +9220,1215 @@
 </p:sld>
 </file>
 
-<file path=ppt/slides/slide21.xml><?xml version="1.0" encoding="utf-8"?>
+<file path=ppt/slides/slide22.xml><?xml version="1.0" encoding="utf-8"?>
+<p:sld xmlns:a="http://schemas.openxmlformats.org/drawingml/2006/main" xmlns:p="http://schemas.openxmlformats.org/presentationml/2006/main" xmlns:r="http://schemas.openxmlformats.org/officeDocument/2006/relationships">
+  <p:cSld>
+    <p:bg>
+      <p:bgPr>
+        <a:solidFill>
+          <a:srgbClr val="FFFFFF"/>
+        </a:solidFill>
+        <a:effectLst/>
+      </p:bgPr>
+    </p:bg>
+    <p:spTree>
+      <p:nvGrpSpPr>
+        <p:cNvPr id="1" name=""/>
+        <p:cNvGrpSpPr/>
+        <p:nvPr/>
+      </p:nvGrpSpPr>
+      <p:grpSpPr/>
+      <p:sp>
+        <p:nvSpPr>
+          <p:cNvPr id="2" name="Rectangle 1"/>
+          <p:cNvSpPr/>
+          <p:nvPr/>
+        </p:nvSpPr>
+        <p:spPr>
+          <a:xfrm>
+            <a:off x="0" y="0"/>
+            <a:ext cx="12191695" cy="1188720"/>
+          </a:xfrm>
+          <a:prstGeom prst="rect">
+            <a:avLst/>
+          </a:prstGeom>
+          <a:solidFill>
+            <a:srgbClr val="0C2340"/>
+          </a:solidFill>
+          <a:ln>
+            <a:noFill/>
+          </a:ln>
+          <a:effectLst/>
+        </p:spPr>
+        <p:style>
+          <a:lnRef idx="1">
+            <a:schemeClr val="accent1"/>
+          </a:lnRef>
+          <a:fillRef idx="3">
+            <a:schemeClr val="accent1"/>
+          </a:fillRef>
+          <a:effectRef idx="2">
+            <a:schemeClr val="accent1"/>
+          </a:effectRef>
+          <a:fontRef idx="minor">
+            <a:schemeClr val="lt1"/>
+          </a:fontRef>
+        </p:style>
+        <p:txBody>
+          <a:bodyPr rtlCol="0" anchor="ctr"/>
+          <a:lstStyle/>
+          <a:p>
+            <a:pPr algn="ctr"/>
+          </a:p>
+        </p:txBody>
+      </p:sp>
+      <p:sp>
+        <p:nvSpPr>
+          <p:cNvPr id="3" name="TextBox 2"/>
+          <p:cNvSpPr txBox="1"/>
+          <p:nvPr/>
+        </p:nvSpPr>
+        <p:spPr>
+          <a:xfrm>
+            <a:off x="640080" y="0"/>
+            <a:ext cx="9082735" cy="1188720"/>
+          </a:xfrm>
+          <a:prstGeom prst="rect">
+            <a:avLst/>
+          </a:prstGeom>
+          <a:noFill/>
+        </p:spPr>
+        <p:txBody>
+          <a:bodyPr wrap="square" anchor="ctr" lIns="0" rIns="0" tIns="0" bIns="0">
+            <a:spAutoFit/>
+          </a:bodyPr>
+          <a:lstStyle/>
+          <a:p>
+            <a:pPr algn="ctr"/>
+            <a:r>
+              <a:rPr sz="2600" b="1" i="0">
+                <a:solidFill>
+                  <a:srgbClr val="FFFFFF"/>
+                </a:solidFill>
+                <a:latin typeface="Calibri"/>
+              </a:rPr>
+              <a:t>RUTA DE ENTREGABLES DEL CURSO</a:t>
+            </a:r>
+          </a:p>
+        </p:txBody>
+      </p:sp>
+      <p:sp>
+        <p:nvSpPr>
+          <p:cNvPr id="4" name="TextBox 3"/>
+          <p:cNvSpPr txBox="1"/>
+          <p:nvPr/>
+        </p:nvSpPr>
+        <p:spPr>
+          <a:xfrm>
+            <a:off x="640080" y="1280160"/>
+            <a:ext cx="10911535" cy="411480"/>
+          </a:xfrm>
+          <a:prstGeom prst="rect">
+            <a:avLst/>
+          </a:prstGeom>
+          <a:noFill/>
+        </p:spPr>
+        <p:txBody>
+          <a:bodyPr wrap="square" anchor="t" lIns="0" rIns="0" tIns="0" bIns="0">
+            <a:spAutoFit/>
+          </a:bodyPr>
+          <a:lstStyle/>
+          <a:p>
+            <a:pPr algn="ctr"/>
+            <a:r>
+              <a:rPr sz="1500" b="0" i="0">
+                <a:solidFill>
+                  <a:srgbClr val="2B2B2B"/>
+                </a:solidFill>
+                <a:latin typeface="Calibri"/>
+              </a:rPr>
+              <a:t>Sin fechas a propósito: aquí va </a:t>
+            </a:r>
+            <a:r>
+              <a:rPr sz="1500" b="1" i="0">
+                <a:solidFill>
+                  <a:srgbClr val="2B2B2B"/>
+                </a:solidFill>
+                <a:latin typeface="Calibri"/>
+              </a:rPr>
+              <a:t>en qué punto del curso</a:t>
+            </a:r>
+            <a:r>
+              <a:rPr sz="1500" b="0" i="0">
+                <a:solidFill>
+                  <a:srgbClr val="2B2B2B"/>
+                </a:solidFill>
+                <a:latin typeface="Calibri"/>
+              </a:rPr>
+              <a:t> cierra cada ítem · la ventana exacta la fija CDigital</a:t>
+            </a:r>
+          </a:p>
+        </p:txBody>
+      </p:sp>
+      <p:graphicFrame>
+        <p:nvGraphicFramePr>
+          <p:cNvPr id="5" name="Table 4"/>
+          <p:cNvGraphicFramePr>
+            <a:graphicFrameLocks noGrp="1"/>
+          </p:cNvGraphicFramePr>
+          <p:nvPr/>
+        </p:nvGraphicFramePr>
+        <p:xfrm>
+          <a:off x="640080" y="2011679"/>
+          <a:ext cx="10911533" cy="4297680"/>
+        </p:xfrm>
+        <a:graphic>
+          <a:graphicData uri="http://schemas.openxmlformats.org/drawingml/2006/table">
+            <a:tbl>
+              <a:tblPr>
+                <a:tableStyleId>{2D5ABB26-0587-4C30-8999-92F81FD0307C}</a:tableStyleId>
+              </a:tblPr>
+              <a:tblGrid>
+                <a:gridCol w="2659113"/>
+                <a:gridCol w="2659113"/>
+                <a:gridCol w="5593307"/>
+              </a:tblGrid>
+              <a:tr h="477520">
+                <a:tc>
+                  <a:txBody>
+                    <a:bodyPr/>
+                    <a:lstStyle/>
+                    <a:p>
+                      <a:pPr algn="l"/>
+                      <a:r>
+                        <a:rPr sz="1300" b="1" i="0">
+                          <a:solidFill>
+                            <a:srgbClr val="FFFFFF"/>
+                          </a:solidFill>
+                          <a:latin typeface="Calibri"/>
+                        </a:rPr>
+                        <a:t>Cierra en la semana de…</a:t>
+                      </a:r>
+                    </a:p>
+                  </a:txBody>
+                  <a:tcPr anchor="ctr" marL="109728" marR="91440" marT="36576" marB="36576">
+                    <a:solidFill>
+                      <a:srgbClr val="0C2340"/>
+                    </a:solidFill>
+                  </a:tcPr>
+                </a:tc>
+                <a:tc>
+                  <a:txBody>
+                    <a:bodyPr/>
+                    <a:lstStyle/>
+                    <a:p>
+                      <a:pPr algn="l"/>
+                      <a:r>
+                        <a:rPr sz="1300" b="1" i="0">
+                          <a:solidFill>
+                            <a:srgbClr val="FFFFFF"/>
+                          </a:solidFill>
+                          <a:latin typeface="Calibri"/>
+                        </a:rPr>
+                        <a:t>Entregable</a:t>
+                      </a:r>
+                    </a:p>
+                  </a:txBody>
+                  <a:tcPr anchor="ctr" marL="109728" marR="91440" marT="36576" marB="36576">
+                    <a:solidFill>
+                      <a:srgbClr val="0C2340"/>
+                    </a:solidFill>
+                  </a:tcPr>
+                </a:tc>
+                <a:tc>
+                  <a:txBody>
+                    <a:bodyPr/>
+                    <a:lstStyle/>
+                    <a:p>
+                      <a:pPr algn="l"/>
+                      <a:r>
+                        <a:rPr sz="1300" b="1" i="0">
+                          <a:solidFill>
+                            <a:srgbClr val="FFFFFF"/>
+                          </a:solidFill>
+                          <a:latin typeface="Calibri"/>
+                        </a:rPr>
+                        <a:t>Qué debes tener listo</a:t>
+                      </a:r>
+                    </a:p>
+                  </a:txBody>
+                  <a:tcPr anchor="ctr" marL="109728" marR="91440" marT="36576" marB="36576">
+                    <a:solidFill>
+                      <a:srgbClr val="0C2340"/>
+                    </a:solidFill>
+                  </a:tcPr>
+                </a:tc>
+              </a:tr>
+              <a:tr h="477520">
+                <a:tc>
+                  <a:txBody>
+                    <a:bodyPr/>
+                    <a:lstStyle/>
+                    <a:p>
+                      <a:pPr algn="l"/>
+                      <a:r>
+                        <a:rPr sz="1100" b="1" i="0">
+                          <a:solidFill>
+                            <a:srgbClr val="2B2B2B"/>
+                          </a:solidFill>
+                          <a:latin typeface="Calibri"/>
+                        </a:rPr>
+                        <a:t>Sesión 02</a:t>
+                      </a:r>
+                      <a:r>
+                        <a:rPr sz="1100" b="0" i="0">
+                          <a:solidFill>
+                            <a:srgbClr val="2B2B2B"/>
+                          </a:solidFill>
+                          <a:latin typeface="Calibri"/>
+                        </a:rPr>
+                        <a:t> · ya cerró</a:t>
+                      </a:r>
+                    </a:p>
+                  </a:txBody>
+                  <a:tcPr anchor="ctr" marL="109728" marR="91440" marT="36576" marB="36576">
+                    <a:solidFill>
+                      <a:srgbClr val="FFFFFF"/>
+                    </a:solidFill>
+                  </a:tcPr>
+                </a:tc>
+                <a:tc>
+                  <a:txBody>
+                    <a:bodyPr/>
+                    <a:lstStyle/>
+                    <a:p>
+                      <a:pPr algn="l"/>
+                      <a:r>
+                        <a:rPr sz="1100" b="1" i="0">
+                          <a:solidFill>
+                            <a:srgbClr val="2B2B2B"/>
+                          </a:solidFill>
+                          <a:latin typeface="Calibri"/>
+                        </a:rPr>
+                        <a:t>Quiz 1</a:t>
+                      </a:r>
+                      <a:r>
+                        <a:rPr sz="1100" b="0" i="0">
+                          <a:solidFill>
+                            <a:srgbClr val="2B2B2B"/>
+                          </a:solidFill>
+                          <a:latin typeface="Calibri"/>
+                        </a:rPr>
+                        <a:t> · Cuestionario · 6%</a:t>
+                      </a:r>
+                    </a:p>
+                  </a:txBody>
+                  <a:tcPr anchor="ctr" marL="109728" marR="91440" marT="36576" marB="36576">
+                    <a:solidFill>
+                      <a:srgbClr val="FFFFFF"/>
+                    </a:solidFill>
+                  </a:tcPr>
+                </a:tc>
+                <a:tc>
+                  <a:txBody>
+                    <a:bodyPr/>
+                    <a:lstStyle/>
+                    <a:p>
+                      <a:pPr algn="l"/>
+                      <a:r>
+                        <a:rPr sz="1100" b="0" i="0">
+                          <a:solidFill>
+                            <a:srgbClr val="2B2B2B"/>
+                          </a:solidFill>
+                          <a:latin typeface="Calibri"/>
+                        </a:rPr>
+                        <a:t>Ten claras las </a:t>
+                      </a:r>
+                      <a:r>
+                        <a:rPr sz="1100" b="1" i="0">
+                          <a:solidFill>
+                            <a:srgbClr val="2B2B2B"/>
+                          </a:solidFill>
+                          <a:latin typeface="Calibri"/>
+                        </a:rPr>
+                        <a:t>etapas del método</a:t>
+                      </a:r>
+                      <a:r>
+                        <a:rPr sz="1100" b="0" i="0">
+                          <a:solidFill>
+                            <a:srgbClr val="2B2B2B"/>
+                          </a:solidFill>
+                          <a:latin typeface="Calibri"/>
+                        </a:rPr>
+                        <a:t> y qué es un artículo de nuevo conocimiento.</a:t>
+                      </a:r>
+                    </a:p>
+                  </a:txBody>
+                  <a:tcPr anchor="ctr" marL="109728" marR="91440" marT="36576" marB="36576">
+                    <a:solidFill>
+                      <a:srgbClr val="FFFFFF"/>
+                    </a:solidFill>
+                  </a:tcPr>
+                </a:tc>
+              </a:tr>
+              <a:tr h="477520">
+                <a:tc>
+                  <a:txBody>
+                    <a:bodyPr/>
+                    <a:lstStyle/>
+                    <a:p>
+                      <a:pPr algn="l"/>
+                      <a:r>
+                        <a:rPr sz="1100" b="1" i="0">
+                          <a:solidFill>
+                            <a:srgbClr val="2B2B2B"/>
+                          </a:solidFill>
+                          <a:latin typeface="Calibri"/>
+                        </a:rPr>
+                        <a:t>Sesión 03</a:t>
+                      </a:r>
+                      <a:r>
+                        <a:rPr sz="1100" b="0" i="0">
+                          <a:solidFill>
+                            <a:srgbClr val="2B2B2B"/>
+                          </a:solidFill>
+                          <a:latin typeface="Calibri"/>
+                        </a:rPr>
+                        <a:t> · ya cerró</a:t>
+                      </a:r>
+                    </a:p>
+                  </a:txBody>
+                  <a:tcPr anchor="ctr" marL="109728" marR="91440" marT="36576" marB="36576">
+                    <a:solidFill>
+                      <a:srgbClr val="F2F2F2"/>
+                    </a:solidFill>
+                  </a:tcPr>
+                </a:tc>
+                <a:tc>
+                  <a:txBody>
+                    <a:bodyPr/>
+                    <a:lstStyle/>
+                    <a:p>
+                      <a:pPr algn="l"/>
+                      <a:r>
+                        <a:rPr sz="1100" b="1" i="0">
+                          <a:solidFill>
+                            <a:srgbClr val="2B2B2B"/>
+                          </a:solidFill>
+                          <a:latin typeface="Calibri"/>
+                        </a:rPr>
+                        <a:t>Parcial 1</a:t>
+                      </a:r>
+                      <a:r>
+                        <a:rPr sz="1100" b="0" i="0">
+                          <a:solidFill>
+                            <a:srgbClr val="2B2B2B"/>
+                          </a:solidFill>
+                          <a:latin typeface="Calibri"/>
+                        </a:rPr>
+                        <a:t> · Cuestionario · 24%</a:t>
+                      </a:r>
+                    </a:p>
+                  </a:txBody>
+                  <a:tcPr anchor="ctr" marL="109728" marR="91440" marT="36576" marB="36576">
+                    <a:solidFill>
+                      <a:srgbClr val="F2F2F2"/>
+                    </a:solidFill>
+                  </a:tcPr>
+                </a:tc>
+                <a:tc>
+                  <a:txBody>
+                    <a:bodyPr/>
+                    <a:lstStyle/>
+                    <a:p>
+                      <a:pPr algn="l"/>
+                      <a:r>
+                        <a:rPr sz="1100" b="0" i="0">
+                          <a:solidFill>
+                            <a:srgbClr val="2B2B2B"/>
+                          </a:solidFill>
+                          <a:latin typeface="Calibri"/>
+                        </a:rPr>
+                        <a:t>Ten memorizadas las </a:t>
+                      </a:r>
+                      <a:r>
+                        <a:rPr sz="1100" b="1" i="0">
+                          <a:solidFill>
+                            <a:srgbClr val="2B2B2B"/>
+                          </a:solidFill>
+                          <a:latin typeface="Calibri"/>
+                        </a:rPr>
+                        <a:t>6 líneas</a:t>
+                      </a:r>
+                      <a:r>
+                        <a:rPr sz="1100" b="0" i="0">
+                          <a:solidFill>
+                            <a:srgbClr val="2B2B2B"/>
+                          </a:solidFill>
+                          <a:latin typeface="Calibri"/>
+                        </a:rPr>
+                        <a:t> de MinCiencias y en cuál se ubica tu tema, y por qué.</a:t>
+                      </a:r>
+                    </a:p>
+                  </a:txBody>
+                  <a:tcPr anchor="ctr" marL="109728" marR="91440" marT="36576" marB="36576">
+                    <a:solidFill>
+                      <a:srgbClr val="F2F2F2"/>
+                    </a:solidFill>
+                  </a:tcPr>
+                </a:tc>
+              </a:tr>
+              <a:tr h="477520">
+                <a:tc>
+                  <a:txBody>
+                    <a:bodyPr/>
+                    <a:lstStyle/>
+                    <a:p>
+                      <a:pPr algn="l"/>
+                      <a:r>
+                        <a:rPr sz="1100" b="1" i="0">
+                          <a:solidFill>
+                            <a:srgbClr val="2B2B2B"/>
+                          </a:solidFill>
+                          <a:latin typeface="Calibri"/>
+                        </a:rPr>
+                        <a:t>Sesión 04</a:t>
+                      </a:r>
+                      <a:r>
+                        <a:rPr sz="1100" b="0" i="0">
+                          <a:solidFill>
+                            <a:srgbClr val="2B2B2B"/>
+                          </a:solidFill>
+                          <a:latin typeface="Calibri"/>
+                        </a:rPr>
+                        <a:t> · ya cerró</a:t>
+                      </a:r>
+                    </a:p>
+                  </a:txBody>
+                  <a:tcPr anchor="ctr" marL="109728" marR="91440" marT="36576" marB="36576">
+                    <a:solidFill>
+                      <a:srgbClr val="FFFFFF"/>
+                    </a:solidFill>
+                  </a:tcPr>
+                </a:tc>
+                <a:tc>
+                  <a:txBody>
+                    <a:bodyPr/>
+                    <a:lstStyle/>
+                    <a:p>
+                      <a:pPr algn="l"/>
+                      <a:r>
+                        <a:rPr sz="1100" b="1" i="0">
+                          <a:solidFill>
+                            <a:srgbClr val="2B2B2B"/>
+                          </a:solidFill>
+                          <a:latin typeface="Calibri"/>
+                        </a:rPr>
+                        <a:t>Quiz 2</a:t>
+                      </a:r>
+                      <a:r>
+                        <a:rPr sz="1100" b="0" i="0">
+                          <a:solidFill>
+                            <a:srgbClr val="2B2B2B"/>
+                          </a:solidFill>
+                          <a:latin typeface="Calibri"/>
+                        </a:rPr>
+                        <a:t> · Cuestionario · 9%</a:t>
+                      </a:r>
+                    </a:p>
+                  </a:txBody>
+                  <a:tcPr anchor="ctr" marL="109728" marR="91440" marT="36576" marB="36576">
+                    <a:solidFill>
+                      <a:srgbClr val="FFFFFF"/>
+                    </a:solidFill>
+                  </a:tcPr>
+                </a:tc>
+                <a:tc>
+                  <a:txBody>
+                    <a:bodyPr/>
+                    <a:lstStyle/>
+                    <a:p>
+                      <a:pPr algn="l"/>
+                      <a:r>
+                        <a:rPr sz="1100" b="0" i="0">
+                          <a:solidFill>
+                            <a:srgbClr val="2B2B2B"/>
+                          </a:solidFill>
+                          <a:latin typeface="Calibri"/>
+                        </a:rPr>
+                        <a:t>Distingue </a:t>
+                      </a:r>
+                      <a:r>
+                        <a:rPr sz="1100" b="1" i="0">
+                          <a:solidFill>
+                            <a:srgbClr val="2B2B2B"/>
+                          </a:solidFill>
+                          <a:latin typeface="Calibri"/>
+                        </a:rPr>
+                        <a:t>tipos de fuente</a:t>
+                      </a:r>
+                      <a:r>
+                        <a:rPr sz="1100" b="0" i="0">
+                          <a:solidFill>
+                            <a:srgbClr val="2B2B2B"/>
+                          </a:solidFill>
+                          <a:latin typeface="Calibri"/>
+                        </a:rPr>
+                        <a:t> y qué la hace confiable: quién firma, dónde y de cuándo es.</a:t>
+                      </a:r>
+                    </a:p>
+                  </a:txBody>
+                  <a:tcPr anchor="ctr" marL="109728" marR="91440" marT="36576" marB="36576">
+                    <a:solidFill>
+                      <a:srgbClr val="FFFFFF"/>
+                    </a:solidFill>
+                  </a:tcPr>
+                </a:tc>
+              </a:tr>
+              <a:tr h="477520">
+                <a:tc>
+                  <a:txBody>
+                    <a:bodyPr/>
+                    <a:lstStyle/>
+                    <a:p>
+                      <a:pPr algn="l"/>
+                      <a:r>
+                        <a:rPr sz="1100" b="1" i="0">
+                          <a:solidFill>
+                            <a:srgbClr val="2B2B2B"/>
+                          </a:solidFill>
+                          <a:latin typeface="Calibri"/>
+                        </a:rPr>
+                        <a:t>Sesión 05</a:t>
+                      </a:r>
+                      <a:r>
+                        <a:rPr sz="1100" b="0" i="0">
+                          <a:solidFill>
+                            <a:srgbClr val="2B2B2B"/>
+                          </a:solidFill>
+                          <a:latin typeface="Calibri"/>
+                        </a:rPr>
+                        <a:t> · ya cerró</a:t>
+                      </a:r>
+                    </a:p>
+                  </a:txBody>
+                  <a:tcPr anchor="ctr" marL="109728" marR="91440" marT="36576" marB="36576">
+                    <a:solidFill>
+                      <a:srgbClr val="F2F2F2"/>
+                    </a:solidFill>
+                  </a:tcPr>
+                </a:tc>
+                <a:tc>
+                  <a:txBody>
+                    <a:bodyPr/>
+                    <a:lstStyle/>
+                    <a:p>
+                      <a:pPr algn="l"/>
+                      <a:r>
+                        <a:rPr sz="1100" b="1" i="0">
+                          <a:solidFill>
+                            <a:srgbClr val="2B2B2B"/>
+                          </a:solidFill>
+                          <a:latin typeface="Calibri"/>
+                        </a:rPr>
+                        <a:t>Parcial 2</a:t>
+                      </a:r>
+                      <a:r>
+                        <a:rPr sz="1100" b="0" i="0">
+                          <a:solidFill>
+                            <a:srgbClr val="2B2B2B"/>
+                          </a:solidFill>
+                          <a:latin typeface="Calibri"/>
+                        </a:rPr>
+                        <a:t> · Cuestionario · 21%</a:t>
+                      </a:r>
+                    </a:p>
+                  </a:txBody>
+                  <a:tcPr anchor="ctr" marL="109728" marR="91440" marT="36576" marB="36576">
+                    <a:solidFill>
+                      <a:srgbClr val="F2F2F2"/>
+                    </a:solidFill>
+                  </a:tcPr>
+                </a:tc>
+                <a:tc>
+                  <a:txBody>
+                    <a:bodyPr/>
+                    <a:lstStyle/>
+                    <a:p>
+                      <a:pPr algn="l"/>
+                      <a:r>
+                        <a:rPr sz="1100" b="0" i="0">
+                          <a:solidFill>
+                            <a:srgbClr val="2B2B2B"/>
+                          </a:solidFill>
+                          <a:latin typeface="Calibri"/>
+                        </a:rPr>
+                        <a:t>Domina problema, pregunta y objetivo, búsqueda con operadores y citas en </a:t>
+                      </a:r>
+                      <a:r>
+                        <a:rPr sz="1100" b="1" i="0">
+                          <a:solidFill>
+                            <a:srgbClr val="2B2B2B"/>
+                          </a:solidFill>
+                          <a:latin typeface="Calibri"/>
+                        </a:rPr>
+                        <a:t>APA 7</a:t>
+                      </a:r>
+                      <a:r>
+                        <a:rPr sz="1100" b="0" i="0">
+                          <a:solidFill>
+                            <a:srgbClr val="2B2B2B"/>
+                          </a:solidFill>
+                          <a:latin typeface="Calibri"/>
+                        </a:rPr>
+                        <a:t>.</a:t>
+                      </a:r>
+                    </a:p>
+                  </a:txBody>
+                  <a:tcPr anchor="ctr" marL="109728" marR="91440" marT="36576" marB="36576">
+                    <a:solidFill>
+                      <a:srgbClr val="F2F2F2"/>
+                    </a:solidFill>
+                  </a:tcPr>
+                </a:tc>
+              </a:tr>
+              <a:tr h="477520">
+                <a:tc>
+                  <a:txBody>
+                    <a:bodyPr/>
+                    <a:lstStyle/>
+                    <a:p>
+                      <a:pPr algn="l"/>
+                      <a:r>
+                        <a:rPr sz="1100" b="1" i="0">
+                          <a:solidFill>
+                            <a:srgbClr val="2B2B2B"/>
+                          </a:solidFill>
+                          <a:latin typeface="Calibri"/>
+                        </a:rPr>
+                        <a:t>Sesión 05</a:t>
+                      </a:r>
+                      <a:r>
+                        <a:rPr sz="1100" b="0" i="0">
+                          <a:solidFill>
+                            <a:srgbClr val="2B2B2B"/>
+                          </a:solidFill>
+                          <a:latin typeface="Calibri"/>
+                        </a:rPr>
+                        <a:t> · ya cerró</a:t>
+                      </a:r>
+                    </a:p>
+                  </a:txBody>
+                  <a:tcPr anchor="ctr" marL="109728" marR="91440" marT="36576" marB="36576">
+                    <a:solidFill>
+                      <a:srgbClr val="FFFFFF"/>
+                    </a:solidFill>
+                  </a:tcPr>
+                </a:tc>
+                <a:tc>
+                  <a:txBody>
+                    <a:bodyPr/>
+                    <a:lstStyle/>
+                    <a:p>
+                      <a:pPr algn="l"/>
+                      <a:r>
+                        <a:rPr sz="1100" b="1" i="0">
+                          <a:solidFill>
+                            <a:srgbClr val="2B2B2B"/>
+                          </a:solidFill>
+                          <a:latin typeface="Calibri"/>
+                        </a:rPr>
+                        <a:t>ACA Final</a:t>
+                      </a:r>
+                      <a:r>
+                        <a:rPr sz="1100" b="0" i="0">
+                          <a:solidFill>
+                            <a:srgbClr val="2B2B2B"/>
+                          </a:solidFill>
+                          <a:latin typeface="Calibri"/>
+                        </a:rPr>
+                        <a:t> · Tarea · 32,8%</a:t>
+                      </a:r>
+                    </a:p>
+                  </a:txBody>
+                  <a:tcPr anchor="ctr" marL="109728" marR="91440" marT="36576" marB="36576">
+                    <a:solidFill>
+                      <a:srgbClr val="FFFFFF"/>
+                    </a:solidFill>
+                  </a:tcPr>
+                </a:tc>
+                <a:tc>
+                  <a:txBody>
+                    <a:bodyPr/>
+                    <a:lstStyle/>
+                    <a:p>
+                      <a:pPr algn="l"/>
+                      <a:r>
+                        <a:rPr sz="1100" b="0" i="0">
+                          <a:solidFill>
+                            <a:srgbClr val="2B2B2B"/>
+                          </a:solidFill>
+                          <a:latin typeface="Calibri"/>
+                        </a:rPr>
+                        <a:t>Sube el </a:t>
+                      </a:r>
+                      <a:r>
+                        <a:rPr sz="1100" b="1" i="0">
+                          <a:solidFill>
+                            <a:srgbClr val="2B2B2B"/>
+                          </a:solidFill>
+                          <a:latin typeface="Calibri"/>
+                        </a:rPr>
+                        <a:t>artículo consolidado</a:t>
+                      </a:r>
+                      <a:r>
+                        <a:rPr sz="1100" b="0" i="0">
+                          <a:solidFill>
+                            <a:srgbClr val="2B2B2B"/>
+                          </a:solidFill>
+                          <a:latin typeface="Calibri"/>
+                        </a:rPr>
+                        <a:t>: problema, pregunta, marco, matriz de fuentes y APA 7.</a:t>
+                      </a:r>
+                    </a:p>
+                  </a:txBody>
+                  <a:tcPr anchor="ctr" marL="109728" marR="91440" marT="36576" marB="36576">
+                    <a:solidFill>
+                      <a:srgbClr val="FFFFFF"/>
+                    </a:solidFill>
+                  </a:tcPr>
+                </a:tc>
+              </a:tr>
+              <a:tr h="477520">
+                <a:tc>
+                  <a:txBody>
+                    <a:bodyPr/>
+                    <a:lstStyle/>
+                    <a:p>
+                      <a:pPr algn="l"/>
+                      <a:r>
+                        <a:rPr sz="1100" b="1" i="0">
+                          <a:solidFill>
+                            <a:srgbClr val="2B2B2B"/>
+                          </a:solidFill>
+                          <a:latin typeface="Calibri"/>
+                        </a:rPr>
+                        <a:t>Sesión 05</a:t>
+                      </a:r>
+                      <a:r>
+                        <a:rPr sz="1100" b="0" i="0">
+                          <a:solidFill>
+                            <a:srgbClr val="2B2B2B"/>
+                          </a:solidFill>
+                          <a:latin typeface="Calibri"/>
+                        </a:rPr>
+                        <a:t> · ya cerró</a:t>
+                      </a:r>
+                    </a:p>
+                  </a:txBody>
+                  <a:tcPr anchor="ctr" marL="109728" marR="91440" marT="36576" marB="36576">
+                    <a:solidFill>
+                      <a:srgbClr val="F2F2F2"/>
+                    </a:solidFill>
+                  </a:tcPr>
+                </a:tc>
+                <a:tc>
+                  <a:txBody>
+                    <a:bodyPr/>
+                    <a:lstStyle/>
+                    <a:p>
+                      <a:pPr algn="l"/>
+                      <a:r>
+                        <a:rPr sz="1100" b="1" i="0">
+                          <a:solidFill>
+                            <a:srgbClr val="2B2B2B"/>
+                          </a:solidFill>
+                          <a:latin typeface="Calibri"/>
+                        </a:rPr>
+                        <a:t>Quiz 3</a:t>
+                      </a:r>
+                      <a:r>
+                        <a:rPr sz="1100" b="0" i="0">
+                          <a:solidFill>
+                            <a:srgbClr val="2B2B2B"/>
+                          </a:solidFill>
+                          <a:latin typeface="Calibri"/>
+                        </a:rPr>
+                        <a:t> · Cuestionario · 4%</a:t>
+                      </a:r>
+                    </a:p>
+                  </a:txBody>
+                  <a:tcPr anchor="ctr" marL="109728" marR="91440" marT="36576" marB="36576">
+                    <a:solidFill>
+                      <a:srgbClr val="F2F2F2"/>
+                    </a:solidFill>
+                  </a:tcPr>
+                </a:tc>
+                <a:tc>
+                  <a:txBody>
+                    <a:bodyPr/>
+                    <a:lstStyle/>
+                    <a:p>
+                      <a:pPr algn="l"/>
+                      <a:r>
+                        <a:rPr sz="1100" b="0" i="0">
+                          <a:solidFill>
+                            <a:srgbClr val="2B2B2B"/>
+                          </a:solidFill>
+                          <a:latin typeface="Calibri"/>
+                        </a:rPr>
+                        <a:t>Ten claras las partes del </a:t>
+                      </a:r>
+                      <a:r>
+                        <a:rPr sz="1100" b="1" i="0">
+                          <a:solidFill>
+                            <a:srgbClr val="2B2B2B"/>
+                          </a:solidFill>
+                          <a:latin typeface="Calibri"/>
+                        </a:rPr>
+                        <a:t>planteamiento</a:t>
+                      </a:r>
+                      <a:r>
+                        <a:rPr sz="1100" b="0" i="0">
+                          <a:solidFill>
+                            <a:srgbClr val="2B2B2B"/>
+                          </a:solidFill>
+                          <a:latin typeface="Calibri"/>
+                        </a:rPr>
+                        <a:t> y qué es una revisión de literatura articulada.</a:t>
+                      </a:r>
+                    </a:p>
+                  </a:txBody>
+                  <a:tcPr anchor="ctr" marL="109728" marR="91440" marT="36576" marB="36576">
+                    <a:solidFill>
+                      <a:srgbClr val="F2F2F2"/>
+                    </a:solidFill>
+                  </a:tcPr>
+                </a:tc>
+              </a:tr>
+              <a:tr h="477520">
+                <a:tc>
+                  <a:txBody>
+                    <a:bodyPr/>
+                    <a:lstStyle/>
+                    <a:p>
+                      <a:pPr algn="l"/>
+                      <a:r>
+                        <a:rPr sz="1100" b="1" i="0">
+                          <a:solidFill>
+                            <a:srgbClr val="2B2B2B"/>
+                          </a:solidFill>
+                          <a:latin typeface="Calibri"/>
+                        </a:rPr>
+                        <a:t>Sesión 06</a:t>
+                      </a:r>
+                      <a:r>
+                        <a:rPr sz="1100" b="0" i="0">
+                          <a:solidFill>
+                            <a:srgbClr val="2B2B2B"/>
+                          </a:solidFill>
+                          <a:latin typeface="Calibri"/>
+                        </a:rPr>
+                        <a:t> · cierra esta semana</a:t>
+                      </a:r>
+                    </a:p>
+                  </a:txBody>
+                  <a:tcPr anchor="ctr" marL="109728" marR="91440" marT="36576" marB="36576">
+                    <a:solidFill>
+                      <a:srgbClr val="FFFFFF"/>
+                    </a:solidFill>
+                  </a:tcPr>
+                </a:tc>
+                <a:tc>
+                  <a:txBody>
+                    <a:bodyPr/>
+                    <a:lstStyle/>
+                    <a:p>
+                      <a:pPr algn="l"/>
+                      <a:r>
+                        <a:rPr sz="1100" b="1" i="0">
+                          <a:solidFill>
+                            <a:srgbClr val="2B2B2B"/>
+                          </a:solidFill>
+                          <a:latin typeface="Calibri"/>
+                        </a:rPr>
+                        <a:t>Autoevaluación</a:t>
+                      </a:r>
+                      <a:r>
+                        <a:rPr sz="1100" b="0" i="0">
+                          <a:solidFill>
+                            <a:srgbClr val="2B2B2B"/>
+                          </a:solidFill>
+                          <a:latin typeface="Calibri"/>
+                        </a:rPr>
+                        <a:t> · Cuestionario · 1,6%</a:t>
+                      </a:r>
+                    </a:p>
+                  </a:txBody>
+                  <a:tcPr anchor="ctr" marL="109728" marR="91440" marT="36576" marB="36576">
+                    <a:solidFill>
+                      <a:srgbClr val="FFFFFF"/>
+                    </a:solidFill>
+                  </a:tcPr>
+                </a:tc>
+                <a:tc>
+                  <a:txBody>
+                    <a:bodyPr/>
+                    <a:lstStyle/>
+                    <a:p>
+                      <a:pPr algn="l"/>
+                      <a:r>
+                        <a:rPr sz="1100" b="0" i="0">
+                          <a:solidFill>
+                            <a:srgbClr val="2B2B2B"/>
+                          </a:solidFill>
+                          <a:latin typeface="Calibri"/>
+                        </a:rPr>
+                        <a:t>Diligénciala tú, según tu </a:t>
+                      </a:r>
+                      <a:r>
+                        <a:rPr sz="1100" b="1" i="0">
+                          <a:solidFill>
+                            <a:srgbClr val="2B2B2B"/>
+                          </a:solidFill>
+                          <a:latin typeface="Calibri"/>
+                        </a:rPr>
+                        <a:t>participación real</a:t>
+                      </a:r>
+                      <a:r>
+                        <a:rPr sz="1100" b="0" i="0">
+                          <a:solidFill>
+                            <a:srgbClr val="2B2B2B"/>
+                          </a:solidFill>
+                          <a:latin typeface="Calibri"/>
+                        </a:rPr>
+                        <a:t> en el periodo.</a:t>
+                      </a:r>
+                    </a:p>
+                  </a:txBody>
+                  <a:tcPr anchor="ctr" marL="109728" marR="91440" marT="36576" marB="36576">
+                    <a:solidFill>
+                      <a:srgbClr val="FFFFFF"/>
+                    </a:solidFill>
+                  </a:tcPr>
+                </a:tc>
+              </a:tr>
+              <a:tr h="477520">
+                <a:tc>
+                  <a:txBody>
+                    <a:bodyPr/>
+                    <a:lstStyle/>
+                    <a:p>
+                      <a:pPr algn="l"/>
+                      <a:r>
+                        <a:rPr sz="1100" b="1" i="0">
+                          <a:solidFill>
+                            <a:srgbClr val="2B2B2B"/>
+                          </a:solidFill>
+                          <a:latin typeface="Calibri"/>
+                        </a:rPr>
+                        <a:t>Sesión 06</a:t>
+                      </a:r>
+                      <a:r>
+                        <a:rPr sz="1100" b="0" i="0">
+                          <a:solidFill>
+                            <a:srgbClr val="2B2B2B"/>
+                          </a:solidFill>
+                          <a:latin typeface="Calibri"/>
+                        </a:rPr>
+                        <a:t> · cierra esta semana</a:t>
+                      </a:r>
+                    </a:p>
+                  </a:txBody>
+                  <a:tcPr anchor="ctr" marL="109728" marR="91440" marT="36576" marB="36576">
+                    <a:solidFill>
+                      <a:srgbClr val="F2F2F2"/>
+                    </a:solidFill>
+                  </a:tcPr>
+                </a:tc>
+                <a:tc>
+                  <a:txBody>
+                    <a:bodyPr/>
+                    <a:lstStyle/>
+                    <a:p>
+                      <a:pPr algn="l"/>
+                      <a:r>
+                        <a:rPr sz="1100" b="1" i="0">
+                          <a:solidFill>
+                            <a:srgbClr val="2B2B2B"/>
+                          </a:solidFill>
+                          <a:latin typeface="Calibri"/>
+                        </a:rPr>
+                        <a:t>Coevaluación</a:t>
+                      </a:r>
+                      <a:r>
+                        <a:rPr sz="1100" b="0" i="0">
+                          <a:solidFill>
+                            <a:srgbClr val="2B2B2B"/>
+                          </a:solidFill>
+                          <a:latin typeface="Calibri"/>
+                        </a:rPr>
+                        <a:t> · Foro · 1,6%</a:t>
+                      </a:r>
+                    </a:p>
+                  </a:txBody>
+                  <a:tcPr anchor="ctr" marL="109728" marR="91440" marT="36576" marB="36576">
+                    <a:solidFill>
+                      <a:srgbClr val="F2F2F2"/>
+                    </a:solidFill>
+                  </a:tcPr>
+                </a:tc>
+                <a:tc>
+                  <a:txBody>
+                    <a:bodyPr/>
+                    <a:lstStyle/>
+                    <a:p>
+                      <a:pPr algn="l"/>
+                      <a:r>
+                        <a:rPr sz="1100" b="1" i="0">
+                          <a:solidFill>
+                            <a:srgbClr val="2B2B2B"/>
+                          </a:solidFill>
+                          <a:latin typeface="Calibri"/>
+                        </a:rPr>
+                        <a:t>Publica tu aporte</a:t>
+                      </a:r>
+                      <a:r>
+                        <a:rPr sz="1100" b="0" i="0">
+                          <a:solidFill>
+                            <a:srgbClr val="2B2B2B"/>
+                          </a:solidFill>
+                          <a:latin typeface="Calibri"/>
+                        </a:rPr>
+                        <a:t>: valora con respeto hechos del trabajo del equipo, no personas.</a:t>
+                      </a:r>
+                    </a:p>
+                  </a:txBody>
+                  <a:tcPr anchor="ctr" marL="109728" marR="91440" marT="36576" marB="36576">
+                    <a:solidFill>
+                      <a:srgbClr val="F2F2F2"/>
+                    </a:solidFill>
+                  </a:tcPr>
+                </a:tc>
+              </a:tr>
+            </a:tbl>
+          </a:graphicData>
+        </a:graphic>
+      </p:graphicFrame>
+      <p:sp>
+        <p:nvSpPr>
+          <p:cNvPr id="6" name="TextBox 5"/>
+          <p:cNvSpPr txBox="1"/>
+          <p:nvPr/>
+        </p:nvSpPr>
+        <p:spPr>
+          <a:xfrm>
+            <a:off x="640080" y="6080760"/>
+            <a:ext cx="10911535" cy="548640"/>
+          </a:xfrm>
+          <a:prstGeom prst="rect">
+            <a:avLst/>
+          </a:prstGeom>
+          <a:noFill/>
+        </p:spPr>
+        <p:txBody>
+          <a:bodyPr wrap="square" anchor="t" lIns="0" rIns="0" tIns="0" bIns="0">
+            <a:spAutoFit/>
+          </a:bodyPr>
+          <a:lstStyle/>
+          <a:p>
+            <a:r>
+              <a:rPr sz="1200" b="0" i="1">
+                <a:solidFill>
+                  <a:srgbClr val="2B2B2B"/>
+                </a:solidFill>
+                <a:latin typeface="Calibri"/>
+              </a:rPr>
+              <a:t>Esta misma tabla va al final de todas las sesiones. La </a:t>
+            </a:r>
+            <a:r>
+              <a:rPr sz="1200" b="1" i="1">
+                <a:solidFill>
+                  <a:srgbClr val="2B2B2B"/>
+                </a:solidFill>
+                <a:latin typeface="Calibri"/>
+              </a:rPr>
+              <a:t>fecha</a:t>
+            </a:r>
+            <a:r>
+              <a:rPr sz="1200" b="0" i="1">
+                <a:solidFill>
+                  <a:srgbClr val="2B2B2B"/>
+                </a:solidFill>
+                <a:latin typeface="Calibri"/>
+              </a:rPr>
+              <a:t> de cada ventana está en el enunciado del ítem (`Clases/Recursos/ACAs/`) y en el aula: si el aula y cualquier otro material se contradicen, </a:t>
+            </a:r>
+            <a:r>
+              <a:rPr sz="1200" b="1" i="1">
+                <a:solidFill>
+                  <a:srgbClr val="2B2B2B"/>
+                </a:solidFill>
+                <a:latin typeface="Calibri"/>
+              </a:rPr>
+              <a:t>manda el aula</a:t>
+            </a:r>
+            <a:r>
+              <a:rPr sz="1200" b="0" i="1">
+                <a:solidFill>
+                  <a:srgbClr val="2B2B2B"/>
+                </a:solidFill>
+                <a:latin typeface="Calibri"/>
+              </a:rPr>
+              <a:t>.</a:t>
+            </a:r>
+          </a:p>
+        </p:txBody>
+      </p:sp>
+      <p:sp>
+        <p:nvSpPr>
+          <p:cNvPr id="7" name="TextBox 6"/>
+          <p:cNvSpPr txBox="1"/>
+          <p:nvPr/>
+        </p:nvSpPr>
+        <p:spPr>
+          <a:xfrm>
+            <a:off x="11094415" y="6446520"/>
+            <a:ext cx="548640" cy="274320"/>
+          </a:xfrm>
+          <a:prstGeom prst="rect">
+            <a:avLst/>
+          </a:prstGeom>
+          <a:noFill/>
+        </p:spPr>
+        <p:txBody>
+          <a:bodyPr wrap="square" anchor="t" lIns="0" rIns="0" tIns="0" bIns="0">
+            <a:spAutoFit/>
+          </a:bodyPr>
+          <a:lstStyle/>
+          <a:p>
+            <a:pPr algn="r"/>
+            <a:r>
+              <a:rPr sz="1000" b="1" i="0">
+                <a:solidFill>
+                  <a:srgbClr val="8F989D"/>
+                </a:solidFill>
+                <a:latin typeface="Calibri"/>
+              </a:rPr>
+              <a:t>22</a:t>
+            </a:r>
+          </a:p>
+        </p:txBody>
+      </p:sp>
+    </p:spTree>
+  </p:cSld>
+  <p:clrMapOvr>
+    <a:masterClrMapping/>
+  </p:clrMapOvr>
+</p:sld>
+</file>
+
+<file path=ppt/slides/slide23.xml><?xml version="1.0" encoding="utf-8"?>
 <p:sld xmlns:a="http://schemas.openxmlformats.org/drawingml/2006/main" xmlns:p="http://schemas.openxmlformats.org/presentationml/2006/main" xmlns:r="http://schemas.openxmlformats.org/officeDocument/2006/relationships">
   <p:cSld>
     <p:bg>
